--- a/docs/Vehicle_Quality_RCA_Architecture.pptx
+++ b/docs/Vehicle_Quality_RCA_Architecture.pptx
@@ -1,19 +1,19 @@
 
 <file path=ppt/presentation.xml><?xml version="1.0" encoding="utf-8"?>
-<p:presentation xmlns:a="http://schemas.openxmlformats.org/drawingml/2006/main" xmlns:r="http://schemas.openxmlformats.org/officeDocument/2006/relationships" xmlns:p="http://schemas.openxmlformats.org/presentationml/2006/main" saveSubsetFonts="1" autoCompressPictures="0">
+<p:presentation xmlns:a="http://schemas.openxmlformats.org/drawingml/2006/main" xmlns:r="http://schemas.openxmlformats.org/officeDocument/2006/relationships" xmlns:p="http://schemas.openxmlformats.org/presentationml/2006/main" autoCompressPictures="0">
   <p:sldMasterIdLst>
     <p:sldMasterId id="2147483648" r:id="rId1"/>
   </p:sldMasterIdLst>
+  <p:notesMasterIdLst>
+    <p:notesMasterId r:id="rId4"/>
+  </p:notesMasterIdLst>
   <p:sldIdLst>
-    <p:sldId id="256" r:id="rId2"/>
-    <p:sldId id="257" r:id="rId3"/>
-    <p:sldId id="258" r:id="rId4"/>
-    <p:sldId id="259" r:id="rId5"/>
-    <p:sldId id="260" r:id="rId6"/>
+    <p:sldId id="256" r:id="rId3"/>
+    <p:sldId id="257" r:id="rId5"/>
+    <p:sldId id="258" r:id="rId6"/>
+    <p:sldId id="259" r:id="rId7"/>
+    <p:sldId id="260" r:id="rId8"/>
   </p:sldIdLst>
-  <p:notesMasterIdLst>
-    <p:notesMasterId r:id="rId7"/>
-  </p:notesMasterIdLst>
   <p:sldSz cx="12192000" cy="6858000"/>
   <p:notesSz cx="6858000" cy="12192000"/>
   <p:defaultTextStyle>
@@ -114,20 +114,31 @@
 <file path=ppt/charts/chart1.xml><?xml version="1.0" encoding="utf-8"?>
 <c:chartSpace xmlns:c="http://schemas.openxmlformats.org/drawingml/2006/chart" xmlns:a="http://schemas.openxmlformats.org/drawingml/2006/main" xmlns:r="http://schemas.openxmlformats.org/officeDocument/2006/relationships">
   <c:date1904 val="0"/>
+  <c:lang val="zh-CN"/>
   <c:roundedCorners val="1"/>
+  <mc:AlternateContent xmlns:mc="http://schemas.openxmlformats.org/markup-compatibility/2006">
+    <mc:Choice xmlns:c14="http://schemas.microsoft.com/office/drawing/2007/8/2/chart" Requires="c14">
+      <c14:style val="102"/>
+    </mc:Choice>
+    <mc:Fallback>
+      <c:style val="2"/>
+    </mc:Fallback>
+  </mc:AlternateContent>
   <c:chart>
     <c:title>
       <c:tx>
         <c:rich>
-          <a:bodyPr/>
+          <a:bodyPr rot="0" spcFirstLastPara="0" vertOverflow="ellipsis" vert="horz" wrap="square" anchor="ctr" anchorCtr="1"/>
           <a:lstStyle/>
           <a:p>
             <a:pPr>
-              <a:defRPr sz="1100" b="0" i="0" u="none" strike="noStrike">
+              <a:defRPr lang="en-US" sz="1100" b="0" i="0" u="none" strike="noStrike" kern="1200" baseline="0">
                 <a:solidFill>
                   <a:srgbClr val="000000"/>
                 </a:solidFill>
-                <a:latin typeface="Calibri"/>
+                <a:latin typeface="Calibri" panose="020F0502020204030204"/>
+                <a:ea typeface="+mn-ea"/>
+                <a:cs typeface="+mn-cs"/>
               </a:defRPr>
             </a:pPr>
             <a:r>
@@ -135,10 +146,16 @@
                 <a:solidFill>
                   <a:srgbClr val="000000"/>
                 </a:solidFill>
-                <a:latin typeface="Calibri"/>
+                <a:latin typeface="Calibri" panose="020F0502020204030204"/>
               </a:rPr>
               <a:t>Supplier Risk — Projected 30-Day Failures</a:t>
             </a:r>
+            <a:endParaRPr sz="1100" b="0" i="0" u="none" strike="noStrike">
+              <a:solidFill>
+                <a:srgbClr val="000000"/>
+              </a:solidFill>
+              <a:latin typeface="Calibri" panose="020F0502020204030204"/>
+            </a:endParaRPr>
           </a:p>
         </c:rich>
       </c:tx>
@@ -175,20 +192,30 @@
           <c:invertIfNegative val="0"/>
           <c:dLbls>
             <c:numFmt formatCode="#,##0" sourceLinked="0"/>
+            <c:spPr>
+              <a:noFill/>
+              <a:ln>
+                <a:noFill/>
+              </a:ln>
+              <a:effectLst/>
+            </c:spPr>
             <c:txPr>
-              <a:bodyPr/>
+              <a:bodyPr rot="0" spcFirstLastPara="0" vertOverflow="ellipsis" vert="horz" wrap="square" lIns="38100" tIns="19050" rIns="38100" bIns="19050" anchor="ctr" anchorCtr="1"/>
               <a:lstStyle/>
               <a:p>
                 <a:pPr>
-                  <a:defRPr b="0" i="0" strike="noStrike" sz="900" u="none">
+                  <a:defRPr lang="en-US" sz="900" b="0" i="0" u="none" strike="noStrike" kern="1200" baseline="0">
                     <a:solidFill>
                       <a:srgbClr val="000000"/>
                     </a:solidFill>
-                    <a:latin typeface="Arial"/>
+                    <a:latin typeface="Arial" panose="020B0604020202020204"/>
+                    <a:ea typeface="+mn-ea"/>
+                    <a:cs typeface="+mn-cs"/>
                   </a:defRPr>
                 </a:pPr>
               </a:p>
             </c:txPr>
+            <c:dLblPos val="outEnd"/>
             <c:showLegendKey val="0"/>
             <c:showVal val="1"/>
             <c:showCatName val="0"/>
@@ -196,31 +223,36 @@
             <c:showPercent val="0"/>
             <c:showBubbleSize val="0"/>
             <c:showLeaderLines val="0"/>
+            <c:extLst>
+              <c:ext xmlns:c15="http://schemas.microsoft.com/office/drawing/2012/chart" uri="{CE6537A1-D6FC-4f65-9D91-7224C49458BB}">
+                <c15:layout/>
+                <c15:showLeaderLines val="0"/>
+                <c15:leaderLines/>
+              </c:ext>
+            </c:extLst>
           </c:dLbls>
           <c:cat>
-            <c:multiLvlStrRef>
+            <c:strRef>
               <c:f>Sheet1!$A$2:$A$6</c:f>
-              <c:multiLvlStrCache>
+              <c:strCache>
                 <c:ptCount val="5"/>
-                <c:lvl>
-                  <c:pt idx="0">
-                    <c:v>123 Battery Mfrs</c:v>
-                  </c:pt>
-                  <c:pt idx="1">
-                    <c:v>ACME Battery</c:v>
-                  </c:pt>
-                  <c:pt idx="2">
-                    <c:v>800-Battery</c:v>
-                  </c:pt>
-                  <c:pt idx="3">
-                    <c:v>ABCD Tech</c:v>
-                  </c:pt>
-                  <c:pt idx="4">
-                    <c:v>WW Batteries</c:v>
-                  </c:pt>
-                </c:lvl>
-              </c:multiLvlStrCache>
-            </c:multiLvlStrRef>
+                <c:pt idx="0">
+                  <c:v>123 Battery Mfrs</c:v>
+                </c:pt>
+                <c:pt idx="1">
+                  <c:v>ACME Battery</c:v>
+                </c:pt>
+                <c:pt idx="2">
+                  <c:v>800-Battery</c:v>
+                </c:pt>
+                <c:pt idx="3">
+                  <c:v>ABCD Tech</c:v>
+                </c:pt>
+                <c:pt idx="4">
+                  <c:v>WW Batteries</c:v>
+                </c:pt>
+              </c:strCache>
+            </c:strRef>
           </c:cat>
           <c:val>
             <c:numRef>
@@ -248,34 +280,17 @@
           </c:val>
         </c:ser>
         <c:dLbls>
-          <c:numFmt formatCode="#,##0" sourceLinked="0"/>
-          <c:txPr>
-            <a:bodyPr/>
-            <a:lstStyle/>
-            <a:p>
-              <a:pPr>
-                <a:defRPr b="0" i="0" strike="noStrike" sz="900" u="none">
-                  <a:solidFill>
-                    <a:srgbClr val="000000"/>
-                  </a:solidFill>
-                  <a:latin typeface="Arial"/>
-                </a:defRPr>
-              </a:pPr>
-            </a:p>
-          </c:txPr>
           <c:showLegendKey val="0"/>
           <c:showVal val="1"/>
           <c:showCatName val="0"/>
           <c:showSerName val="0"/>
           <c:showPercent val="0"/>
           <c:showBubbleSize val="0"/>
-          <c:showLeaderLines val="0"/>
         </c:dLbls>
         <c:gapWidth val="150"/>
         <c:overlap val="0"/>
         <c:axId val="2094734554"/>
         <c:axId val="2094734552"/>
-        <c:axId val="2094734556"/>
       </c:barChart>
       <c:catAx>
         <c:axId val="2094734554"/>
@@ -289,7 +304,7 @@
         <c:minorTickMark val="none"/>
         <c:tickLblPos val="low"/>
         <c:spPr>
-          <a:ln w="12700" cap="flat">
+          <a:ln w="12700" cap="flat" cmpd="sng" algn="ctr">
             <a:solidFill>
               <a:srgbClr val="888888"/>
             </a:solidFill>
@@ -298,24 +313,26 @@
           </a:ln>
         </c:spPr>
         <c:txPr>
-          <a:bodyPr/>
+          <a:bodyPr rot="-60000000" spcFirstLastPara="0" vertOverflow="ellipsis" vert="horz" wrap="square" anchor="ctr" anchorCtr="1"/>
           <a:lstStyle/>
           <a:p>
             <a:pPr>
-              <a:defRPr sz="850" b="0" i="0" u="none" strike="noStrike">
+              <a:defRPr lang="en-US" sz="850" b="0" i="0" u="none" strike="noStrike" kern="1200" baseline="0">
                 <a:solidFill>
                   <a:srgbClr val="6B7280"/>
                 </a:solidFill>
-                <a:latin typeface="Calibri"/>
+                <a:latin typeface="Calibri" panose="020F0502020204030204"/>
+                <a:ea typeface="+mn-ea"/>
+                <a:cs typeface="+mn-cs"/>
               </a:defRPr>
             </a:pPr>
-            <a:endParaRPr lang="en-US"/>
           </a:p>
         </c:txPr>
         <c:crossAx val="2094734552"/>
         <c:crosses val="autoZero"/>
         <c:auto val="1"/>
         <c:lblAlgn val="ctr"/>
+        <c:lblOffset val="100"/>
         <c:noMultiLvlLbl val="1"/>
       </c:catAx>
       <c:valAx>
@@ -327,7 +344,7 @@
         <c:axPos val="l"/>
         <c:majorGridlines>
           <c:spPr>
-            <a:ln w="12700" cap="flat">
+            <a:ln w="12700" cap="flat" cmpd="sng" algn="ctr">
               <a:solidFill>
                 <a:srgbClr val="E5E9F2"/>
               </a:solidFill>
@@ -341,7 +358,7 @@
         <c:minorTickMark val="none"/>
         <c:tickLblPos val="nextTo"/>
         <c:spPr>
-          <a:ln w="12700" cap="flat">
+          <a:ln w="12700" cap="flat" cmpd="sng" algn="ctr">
             <a:solidFill>
               <a:srgbClr val="888888"/>
             </a:solidFill>
@@ -350,18 +367,19 @@
           </a:ln>
         </c:spPr>
         <c:txPr>
-          <a:bodyPr/>
+          <a:bodyPr rot="-60000000" spcFirstLastPara="0" vertOverflow="ellipsis" vert="horz" wrap="square" anchor="ctr" anchorCtr="1"/>
           <a:lstStyle/>
           <a:p>
             <a:pPr>
-              <a:defRPr sz="800" b="0" i="0" u="none" strike="noStrike">
+              <a:defRPr lang="en-US" sz="800" b="0" i="0" u="none" strike="noStrike" kern="1200" baseline="0">
                 <a:solidFill>
                   <a:srgbClr val="6B7280"/>
                 </a:solidFill>
-                <a:latin typeface="Calibri"/>
+                <a:latin typeface="Calibri" panose="020F0502020204030204"/>
+                <a:ea typeface="+mn-ea"/>
+                <a:cs typeface="+mn-cs"/>
               </a:defRPr>
             </a:pPr>
-            <a:endParaRPr lang="en-US"/>
           </a:p>
         </c:txPr>
         <c:crossAx val="2094734554"/>
@@ -378,6 +396,12 @@
     </c:plotArea>
     <c:plotVisOnly val="1"/>
     <c:dispBlanksAs val="span"/>
+    <c:showDLblsOverMax val="0"/>
+    <c:extLst>
+      <c:ext uri="{0b15fc19-7d7d-44ad-8c2d-2c3a37ce22c3}">
+        <chartProps xmlns="https://web.wps.cn/et/2018/main" chartId="{2fc1f7c4-a848-4371-8b9f-76f2a9234687}"/>
+      </c:ext>
+    </c:extLst>
   </c:chart>
   <c:spPr>
     <a:noFill/>
@@ -386,6 +410,15 @@
     </a:ln>
     <a:effectLst/>
   </c:spPr>
+  <c:txPr>
+    <a:bodyPr/>
+    <a:lstStyle/>
+    <a:p>
+      <a:pPr>
+        <a:defRPr lang="en-US"/>
+      </a:pPr>
+    </a:p>
+  </c:txPr>
   <c:externalData r:id="rId1">
     <c:autoUpdate val="0"/>
   </c:externalData>
@@ -474,7 +507,6 @@
           <a:p>
             <a:fld id="{5282F153-3F37-0F45-9E97-73ACFA13230C}" type="datetimeFigureOut">
               <a:rPr lang="en-US"/>
-              <a:t>7/23/19</a:t>
             </a:fld>
             <a:endParaRPr lang="en-US"/>
           </a:p>
@@ -541,6 +573,7 @@
               <a:rPr lang="en-US"/>
               <a:t>Click to edit Master text styles</a:t>
             </a:r>
+            <a:endParaRPr lang="en-US"/>
           </a:p>
           <a:p>
             <a:pPr lvl="1"/>
@@ -548,6 +581,7 @@
               <a:rPr lang="en-US"/>
               <a:t>Second level</a:t>
             </a:r>
+            <a:endParaRPr lang="en-US"/>
           </a:p>
           <a:p>
             <a:pPr lvl="2"/>
@@ -555,6 +589,7 @@
               <a:rPr lang="en-US"/>
               <a:t>Third level</a:t>
             </a:r>
+            <a:endParaRPr lang="en-US"/>
           </a:p>
           <a:p>
             <a:pPr lvl="3"/>
@@ -562,6 +597,7 @@
               <a:rPr lang="en-US"/>
               <a:t>Fourth level</a:t>
             </a:r>
+            <a:endParaRPr lang="en-US"/>
           </a:p>
           <a:p>
             <a:pPr lvl="4"/>
@@ -569,6 +605,7 @@
               <a:rPr lang="en-US"/>
               <a:t>Fifth level</a:t>
             </a:r>
+            <a:endParaRPr lang="en-US"/>
           </a:p>
         </p:txBody>
       </p:sp>
@@ -632,18 +669,12 @@
           <a:p>
             <a:fld id="{CE5E9CC1-C706-0F49-92D6-E571CC5EEA8F}" type="slidenum">
               <a:rPr lang="en-US"/>
-              <a:t>‹#›</a:t>
             </a:fld>
             <a:endParaRPr lang="en-US"/>
           </a:p>
         </p:txBody>
       </p:sp>
     </p:spTree>
-    <p:extLst>
-      <p:ext uri="{BB962C8B-B14F-4D97-AF65-F5344CB8AC3E}">
-        <p14:creationId xmlns:p14="http://schemas.microsoft.com/office/powerpoint/2010/main" val="1024086991"/>
-      </p:ext>
-    </p:extLst>
   </p:cSld>
   <p:clrMap bg1="lt1" tx1="dk1" bg2="lt2" tx2="dk2" accent1="accent1" accent2="accent2" accent3="accent3" accent4="accent4" accent5="accent5" accent6="accent6" hlink="hlink" folHlink="folHlink"/>
   <p:notesStyle>
@@ -785,10 +816,6 @@
           <a:bodyPr/>
           <a:lstStyle/>
           <a:p>
-            <a:r>
-              <a:rPr lang="en-US" dirty="0"/>
-              <a:t/>
-            </a:r>
             <a:endParaRPr lang="en-US" dirty="0"/>
           </a:p>
         </p:txBody>
@@ -810,18 +837,12 @@
           <a:p>
             <a:fld id="{F7021451-1387-4CA6-816F-3879F97B5CBC}" type="slidenum">
               <a:rPr lang="en-US"/>
-              <a:t>1</a:t>
             </a:fld>
             <a:endParaRPr lang="en-US"/>
           </a:p>
         </p:txBody>
       </p:sp>
     </p:spTree>
-    <p:extLst>
-      <p:ext uri="{BB962C8B-B14F-4D97-AF65-F5344CB8AC3E}">
-        <p14:creationId xmlns:p14="http://schemas.microsoft.com/office/powerpoint/2010/main" val="1024086991"/>
-      </p:ext>
-    </p:extLst>
   </p:cSld>
   <p:clrMapOvr>
     <a:masterClrMapping/>
@@ -873,10 +894,6 @@
           <a:bodyPr/>
           <a:lstStyle/>
           <a:p>
-            <a:r>
-              <a:rPr lang="en-US" dirty="0"/>
-              <a:t/>
-            </a:r>
             <a:endParaRPr lang="en-US" dirty="0"/>
           </a:p>
         </p:txBody>
@@ -898,18 +915,12 @@
           <a:p>
             <a:fld id="{F7021451-1387-4CA6-816F-3879F97B5CBC}" type="slidenum">
               <a:rPr lang="en-US"/>
-              <a:t>2</a:t>
             </a:fld>
             <a:endParaRPr lang="en-US"/>
           </a:p>
         </p:txBody>
       </p:sp>
     </p:spTree>
-    <p:extLst>
-      <p:ext uri="{BB962C8B-B14F-4D97-AF65-F5344CB8AC3E}">
-        <p14:creationId xmlns:p14="http://schemas.microsoft.com/office/powerpoint/2010/main" val="1024086991"/>
-      </p:ext>
-    </p:extLst>
   </p:cSld>
   <p:clrMapOvr>
     <a:masterClrMapping/>
@@ -961,10 +972,6 @@
           <a:bodyPr/>
           <a:lstStyle/>
           <a:p>
-            <a:r>
-              <a:rPr lang="en-US" dirty="0"/>
-              <a:t/>
-            </a:r>
             <a:endParaRPr lang="en-US" dirty="0"/>
           </a:p>
         </p:txBody>
@@ -986,18 +993,12 @@
           <a:p>
             <a:fld id="{F7021451-1387-4CA6-816F-3879F97B5CBC}" type="slidenum">
               <a:rPr lang="en-US"/>
-              <a:t>3</a:t>
             </a:fld>
             <a:endParaRPr lang="en-US"/>
           </a:p>
         </p:txBody>
       </p:sp>
     </p:spTree>
-    <p:extLst>
-      <p:ext uri="{BB962C8B-B14F-4D97-AF65-F5344CB8AC3E}">
-        <p14:creationId xmlns:p14="http://schemas.microsoft.com/office/powerpoint/2010/main" val="1024086991"/>
-      </p:ext>
-    </p:extLst>
   </p:cSld>
   <p:clrMapOvr>
     <a:masterClrMapping/>
@@ -1049,10 +1050,6 @@
           <a:bodyPr/>
           <a:lstStyle/>
           <a:p>
-            <a:r>
-              <a:rPr lang="en-US" dirty="0"/>
-              <a:t/>
-            </a:r>
             <a:endParaRPr lang="en-US" dirty="0"/>
           </a:p>
         </p:txBody>
@@ -1074,18 +1071,12 @@
           <a:p>
             <a:fld id="{F7021451-1387-4CA6-816F-3879F97B5CBC}" type="slidenum">
               <a:rPr lang="en-US"/>
-              <a:t>4</a:t>
             </a:fld>
             <a:endParaRPr lang="en-US"/>
           </a:p>
         </p:txBody>
       </p:sp>
     </p:spTree>
-    <p:extLst>
-      <p:ext uri="{BB962C8B-B14F-4D97-AF65-F5344CB8AC3E}">
-        <p14:creationId xmlns:p14="http://schemas.microsoft.com/office/powerpoint/2010/main" val="1024086991"/>
-      </p:ext>
-    </p:extLst>
   </p:cSld>
   <p:clrMapOvr>
     <a:masterClrMapping/>
@@ -1137,10 +1128,6 @@
           <a:bodyPr/>
           <a:lstStyle/>
           <a:p>
-            <a:r>
-              <a:rPr lang="en-US" dirty="0"/>
-              <a:t/>
-            </a:r>
             <a:endParaRPr lang="en-US" dirty="0"/>
           </a:p>
         </p:txBody>
@@ -1162,18 +1149,12 @@
           <a:p>
             <a:fld id="{F7021451-1387-4CA6-816F-3879F97B5CBC}" type="slidenum">
               <a:rPr lang="en-US"/>
-              <a:t>5</a:t>
             </a:fld>
             <a:endParaRPr lang="en-US"/>
           </a:p>
         </p:txBody>
       </p:sp>
     </p:spTree>
-    <p:extLst>
-      <p:ext uri="{BB962C8B-B14F-4D97-AF65-F5344CB8AC3E}">
-        <p14:creationId xmlns:p14="http://schemas.microsoft.com/office/powerpoint/2010/main" val="1024086991"/>
-      </p:ext>
-    </p:extLst>
   </p:cSld>
   <p:clrMapOvr>
     <a:masterClrMapping/>
@@ -1214,6 +1195,11 @@
 <file path=ppt/slideMasters/slideMaster1.xml><?xml version="1.0" encoding="utf-8"?>
 <p:sldMaster xmlns:a="http://schemas.openxmlformats.org/drawingml/2006/main" xmlns:r="http://schemas.openxmlformats.org/officeDocument/2006/relationships" xmlns:p="http://schemas.openxmlformats.org/presentationml/2006/main">
   <p:cSld>
+    <p:bg>
+      <p:bgRef idx="1001">
+        <a:schemeClr val="bg1"/>
+      </p:bgRef>
+    </p:bg>
     <p:spTree>
       <p:nvGrpSpPr>
         <p:cNvPr id="1" name=""/>
@@ -1257,7 +1243,7 @@
         <a:spcBef>
           <a:spcPct val="20000"/>
         </a:spcBef>
-        <a:buFont typeface="Arial" pitchFamily="34" charset="0"/>
+        <a:buFont typeface="Arial" panose="020B0604020202020204" pitchFamily="34" charset="0"/>
         <a:buChar char="•"/>
         <a:defRPr sz="3200" kern="1200">
           <a:solidFill>
@@ -1272,7 +1258,7 @@
         <a:spcBef>
           <a:spcPct val="20000"/>
         </a:spcBef>
-        <a:buFont typeface="Arial" pitchFamily="34" charset="0"/>
+        <a:buFont typeface="Arial" panose="020B0604020202020204" pitchFamily="34" charset="0"/>
         <a:buChar char="–"/>
         <a:defRPr sz="2800" kern="1200">
           <a:solidFill>
@@ -1287,7 +1273,7 @@
         <a:spcBef>
           <a:spcPct val="20000"/>
         </a:spcBef>
-        <a:buFont typeface="Arial" pitchFamily="34" charset="0"/>
+        <a:buFont typeface="Arial" panose="020B0604020202020204" pitchFamily="34" charset="0"/>
         <a:buChar char="•"/>
         <a:defRPr sz="2400" kern="1200">
           <a:solidFill>
@@ -1302,7 +1288,7 @@
         <a:spcBef>
           <a:spcPct val="20000"/>
         </a:spcBef>
-        <a:buFont typeface="Arial" pitchFamily="34" charset="0"/>
+        <a:buFont typeface="Arial" panose="020B0604020202020204" pitchFamily="34" charset="0"/>
         <a:buChar char="–"/>
         <a:defRPr sz="2000" kern="1200">
           <a:solidFill>
@@ -1317,7 +1303,7 @@
         <a:spcBef>
           <a:spcPct val="20000"/>
         </a:spcBef>
-        <a:buFont typeface="Arial" pitchFamily="34" charset="0"/>
+        <a:buFont typeface="Arial" panose="020B0604020202020204" pitchFamily="34" charset="0"/>
         <a:buChar char="»"/>
         <a:defRPr sz="2000" kern="1200">
           <a:solidFill>
@@ -1332,7 +1318,7 @@
         <a:spcBef>
           <a:spcPct val="20000"/>
         </a:spcBef>
-        <a:buFont typeface="Arial" pitchFamily="34" charset="0"/>
+        <a:buFont typeface="Arial" panose="020B0604020202020204" pitchFamily="34" charset="0"/>
         <a:buChar char="•"/>
         <a:defRPr sz="2000" kern="1200">
           <a:solidFill>
@@ -1347,7 +1333,7 @@
         <a:spcBef>
           <a:spcPct val="20000"/>
         </a:spcBef>
-        <a:buFont typeface="Arial" pitchFamily="34" charset="0"/>
+        <a:buFont typeface="Arial" panose="020B0604020202020204" pitchFamily="34" charset="0"/>
         <a:buChar char="•"/>
         <a:defRPr sz="2000" kern="1200">
           <a:solidFill>
@@ -1362,7 +1348,7 @@
         <a:spcBef>
           <a:spcPct val="20000"/>
         </a:spcBef>
-        <a:buFont typeface="Arial" pitchFamily="34" charset="0"/>
+        <a:buFont typeface="Arial" panose="020B0604020202020204" pitchFamily="34" charset="0"/>
         <a:buChar char="•"/>
         <a:defRPr sz="2000" kern="1200">
           <a:solidFill>
@@ -1377,7 +1363,7 @@
         <a:spcBef>
           <a:spcPct val="20000"/>
         </a:spcBef>
-        <a:buFont typeface="Arial" pitchFamily="34" charset="0"/>
+        <a:buFont typeface="Arial" panose="020B0604020202020204" pitchFamily="34" charset="0"/>
         <a:buChar char="•"/>
         <a:defRPr sz="2000" kern="1200">
           <a:solidFill>
@@ -1490,12 +1476,13 @@
 
 <file path=ppt/slides/slide1.xml><?xml version="1.0" encoding="utf-8"?>
 <p:sld xmlns:a="http://schemas.openxmlformats.org/drawingml/2006/main" xmlns:r="http://schemas.openxmlformats.org/officeDocument/2006/relationships" xmlns:p="http://schemas.openxmlformats.org/presentationml/2006/main">
-  <p:cSld name="Slide 1">
+  <p:cSld>
     <p:bg>
       <p:bgPr>
         <a:solidFill>
           <a:srgbClr val="1E2761"/>
         </a:solidFill>
+        <a:effectLst/>
       </p:bgPr>
     </p:bg>
     <p:spTree>
@@ -1529,7 +1516,6 @@
           <a:solidFill>
             <a:srgbClr val="24316E"/>
           </a:solidFill>
-          <a:ln/>
         </p:spPr>
       </p:sp>
       <p:sp>
@@ -1549,7 +1535,6 @@
           <a:solidFill>
             <a:srgbClr val="24316E"/>
           </a:solidFill>
-          <a:ln/>
         </p:spPr>
       </p:sp>
       <p:sp>
@@ -1567,23 +1552,22 @@
             <a:avLst/>
           </a:prstGeom>
           <a:noFill/>
-          <a:ln/>
-        </p:spPr>
-        <p:txBody>
-          <a:bodyPr wrap="square" rtlCol="0" anchor="ctr"/>
-          <a:lstStyle/>
-          <a:p>
-            <a:pPr indent="0" marL="0">
-              <a:buNone/>
-            </a:pPr>
-            <a:r>
-              <a:rPr lang="en-US" sz="1300" b="1" spc="300" kern="0" dirty="0">
+        </p:spPr>
+        <p:txBody>
+          <a:bodyPr wrap="square" rtlCol="0" anchor="ctr"/>
+          <a:lstStyle/>
+          <a:p>
+            <a:pPr marL="0" indent="0">
+              <a:buNone/>
+            </a:pPr>
+            <a:r>
+              <a:rPr lang="en-US" sz="1300" b="1" kern="0" spc="300" dirty="0">
                 <a:solidFill>
                   <a:srgbClr val="CADCFC"/>
                 </a:solidFill>
-                <a:latin typeface="Calibri" pitchFamily="34" charset="0"/>
-                <a:ea typeface="Calibri" pitchFamily="34" charset="-122"/>
-                <a:cs typeface="Calibri" pitchFamily="34" charset="-120"/>
+                <a:latin typeface="Calibri" panose="020F0502020204030204" pitchFamily="34" charset="0"/>
+                <a:ea typeface="Calibri" panose="020F0502020204030204" pitchFamily="34" charset="-122"/>
+                <a:cs typeface="Calibri" panose="020F0502020204030204" pitchFamily="34" charset="-120"/>
               </a:rPr>
               <a:t>SNOWFLAKE × CAPGEMINI HACKATHON 2026</a:t>
             </a:r>
@@ -1606,13 +1590,12 @@
             <a:avLst/>
           </a:prstGeom>
           <a:noFill/>
-          <a:ln/>
-        </p:spPr>
-        <p:txBody>
-          <a:bodyPr wrap="square" rtlCol="0" anchor="ctr"/>
-          <a:lstStyle/>
-          <a:p>
-            <a:pPr indent="0" marL="0">
+        </p:spPr>
+        <p:txBody>
+          <a:bodyPr wrap="square" rtlCol="0" anchor="ctr"/>
+          <a:lstStyle/>
+          <a:p>
+            <a:pPr marL="0" indent="0">
               <a:lnSpc>
                 <a:spcPct val="105000"/>
               </a:lnSpc>
@@ -1623,16 +1606,16 @@
                 <a:solidFill>
                   <a:srgbClr val="FFFFFF"/>
                 </a:solidFill>
-                <a:latin typeface="Cambria" pitchFamily="34" charset="0"/>
-                <a:ea typeface="Cambria" pitchFamily="34" charset="-122"/>
-                <a:cs typeface="Cambria" pitchFamily="34" charset="-120"/>
+                <a:latin typeface="Cambria" panose="02040503050406030204" pitchFamily="34" charset="0"/>
+                <a:ea typeface="Cambria" panose="02040503050406030204" pitchFamily="34" charset="-122"/>
+                <a:cs typeface="Cambria" panose="02040503050406030204" pitchFamily="34" charset="-120"/>
               </a:rPr>
               <a:t>Vehicle Quality Root Cause</a:t>
             </a:r>
             <a:endParaRPr lang="en-US" sz="4600" dirty="0"/>
           </a:p>
           <a:p>
-            <a:pPr indent="0" marL="0">
+            <a:pPr marL="0" indent="0">
               <a:lnSpc>
                 <a:spcPct val="105000"/>
               </a:lnSpc>
@@ -1643,9 +1626,9 @@
                 <a:solidFill>
                   <a:srgbClr val="FFFFFF"/>
                 </a:solidFill>
-                <a:latin typeface="Cambria" pitchFamily="34" charset="0"/>
-                <a:ea typeface="Cambria" pitchFamily="34" charset="-122"/>
-                <a:cs typeface="Cambria" pitchFamily="34" charset="-120"/>
+                <a:latin typeface="Cambria" panose="02040503050406030204" pitchFamily="34" charset="0"/>
+                <a:ea typeface="Cambria" panose="02040503050406030204" pitchFamily="34" charset="-122"/>
+                <a:cs typeface="Cambria" panose="02040503050406030204" pitchFamily="34" charset="-120"/>
               </a:rPr>
               <a:t>Analysis Platform</a:t>
             </a:r>
@@ -1668,13 +1651,12 @@
             <a:avLst/>
           </a:prstGeom>
           <a:noFill/>
-          <a:ln/>
-        </p:spPr>
-        <p:txBody>
-          <a:bodyPr wrap="square" rtlCol="0" anchor="ctr"/>
-          <a:lstStyle/>
-          <a:p>
-            <a:pPr indent="0" marL="0">
+        </p:spPr>
+        <p:txBody>
+          <a:bodyPr wrap="square" rtlCol="0" anchor="ctr"/>
+          <a:lstStyle/>
+          <a:p>
+            <a:pPr marL="0" indent="0">
               <a:lnSpc>
                 <a:spcPct val="125000"/>
               </a:lnSpc>
@@ -1685,9 +1667,9 @@
                 <a:solidFill>
                   <a:srgbClr val="CADCFC"/>
                 </a:solidFill>
-                <a:latin typeface="Calibri" pitchFamily="34" charset="0"/>
-                <a:ea typeface="Calibri" pitchFamily="34" charset="-122"/>
-                <a:cs typeface="Calibri" pitchFamily="34" charset="-120"/>
+                <a:latin typeface="Calibri" panose="020F0502020204030204" pitchFamily="34" charset="0"/>
+                <a:ea typeface="Calibri" panose="020F0502020204030204" pitchFamily="34" charset="-122"/>
+                <a:cs typeface="Calibri" panose="020F0502020204030204" pitchFamily="34" charset="-120"/>
               </a:rPr>
               <a:t>Predictive quality intelligence for connected vehicles — integrating telemetry, manufacturing, and supplier data to forecast and prevent failures before they reach customers.</a:t>
             </a:r>
@@ -1733,13 +1715,12 @@
             <a:avLst/>
           </a:prstGeom>
           <a:noFill/>
-          <a:ln/>
-        </p:spPr>
-        <p:txBody>
-          <a:bodyPr wrap="square" rtlCol="0" anchor="ctr"/>
-          <a:lstStyle/>
-          <a:p>
-            <a:pPr indent="0" marL="0">
+        </p:spPr>
+        <p:txBody>
+          <a:bodyPr wrap="square" rtlCol="0" anchor="ctr"/>
+          <a:lstStyle/>
+          <a:p>
+            <a:pPr marL="0" indent="0">
               <a:buNone/>
             </a:pPr>
             <a:r>
@@ -1747,13 +1728,31 @@
                 <a:solidFill>
                   <a:srgbClr val="FFFFFF"/>
                 </a:solidFill>
-                <a:latin typeface="Calibri" pitchFamily="34" charset="0"/>
-                <a:ea typeface="Calibri" pitchFamily="34" charset="-122"/>
-                <a:cs typeface="Calibri" pitchFamily="34" charset="-120"/>
-              </a:rPr>
-              <a:t>Team VoltGuard</a:t>
-            </a:r>
-            <a:endParaRPr lang="en-US" sz="1500" dirty="0"/>
+                <a:latin typeface="Calibri" panose="020F0502020204030204" pitchFamily="34" charset="0"/>
+                <a:ea typeface="Calibri" panose="020F0502020204030204" pitchFamily="34" charset="-122"/>
+                <a:cs typeface="Calibri" panose="020F0502020204030204" pitchFamily="34" charset="-120"/>
+              </a:rPr>
+              <a:t>Team </a:t>
+            </a:r>
+            <a:r>
+              <a:rPr lang="en-IN" altLang="en-US" sz="1500" b="1" dirty="0">
+                <a:solidFill>
+                  <a:srgbClr val="FFFFFF"/>
+                </a:solidFill>
+                <a:latin typeface="Calibri" panose="020F0502020204030204" pitchFamily="34" charset="0"/>
+                <a:ea typeface="Calibri" panose="020F0502020204030204" pitchFamily="34" charset="-122"/>
+                <a:cs typeface="Calibri" panose="020F0502020204030204" pitchFamily="34" charset="-120"/>
+              </a:rPr>
+              <a:t>The Snow Coders</a:t>
+            </a:r>
+            <a:endParaRPr lang="en-IN" altLang="en-US" sz="1500" b="1" dirty="0">
+              <a:solidFill>
+                <a:srgbClr val="FFFFFF"/>
+              </a:solidFill>
+              <a:latin typeface="Calibri" panose="020F0502020204030204" pitchFamily="34" charset="0"/>
+              <a:ea typeface="Calibri" panose="020F0502020204030204" pitchFamily="34" charset="-122"/>
+              <a:cs typeface="Calibri" panose="020F0502020204030204" pitchFamily="34" charset="-120"/>
+            </a:endParaRPr>
           </a:p>
         </p:txBody>
       </p:sp>
@@ -1772,27 +1771,89 @@
             <a:avLst/>
           </a:prstGeom>
           <a:noFill/>
-          <a:ln/>
-        </p:spPr>
-        <p:txBody>
-          <a:bodyPr wrap="square" rtlCol="0" anchor="ctr"/>
-          <a:lstStyle/>
-          <a:p>
-            <a:pPr indent="0" marL="0">
-              <a:buNone/>
-            </a:pPr>
+        </p:spPr>
+        <p:txBody>
+          <a:bodyPr wrap="square" rtlCol="0" anchor="ctr"/>
+          <a:lstStyle/>
+          <a:p>
+            <a:pPr marL="0" indent="0">
+              <a:buNone/>
+            </a:pPr>
+            <a:r>
+              <a:rPr lang="en-IN" altLang="en-US" sz="1150" dirty="0">
+                <a:solidFill>
+                  <a:srgbClr val="CADCFC"/>
+                </a:solidFill>
+                <a:latin typeface="Calibri" panose="020F0502020204030204" pitchFamily="34" charset="0"/>
+                <a:ea typeface="Calibri" panose="020F0502020204030204" pitchFamily="34" charset="-122"/>
+                <a:cs typeface="Calibri" panose="020F0502020204030204" pitchFamily="34" charset="-120"/>
+              </a:rPr>
+              <a:t>Punith KG</a:t>
+            </a:r>
             <a:r>
               <a:rPr lang="en-US" sz="1150" dirty="0">
                 <a:solidFill>
                   <a:srgbClr val="CADCFC"/>
                 </a:solidFill>
-                <a:latin typeface="Calibri" pitchFamily="34" charset="0"/>
-                <a:ea typeface="Calibri" pitchFamily="34" charset="-122"/>
-                <a:cs typeface="Calibri" pitchFamily="34" charset="-120"/>
-              </a:rPr>
-              <a:t>Rishabh Shukla  ·  Teammate 2  ·  Teammate 3</a:t>
-            </a:r>
-            <a:endParaRPr lang="en-US" sz="1150" dirty="0"/>
+                <a:latin typeface="Calibri" panose="020F0502020204030204" pitchFamily="34" charset="0"/>
+                <a:ea typeface="Calibri" panose="020F0502020204030204" pitchFamily="34" charset="-122"/>
+                <a:cs typeface="Calibri" panose="020F0502020204030204" pitchFamily="34" charset="-120"/>
+              </a:rPr>
+              <a:t> ·  </a:t>
+            </a:r>
+            <a:r>
+              <a:rPr lang="en-IN" altLang="en-US" sz="1150" dirty="0">
+                <a:solidFill>
+                  <a:srgbClr val="CADCFC"/>
+                </a:solidFill>
+                <a:latin typeface="Calibri" panose="020F0502020204030204" pitchFamily="34" charset="0"/>
+                <a:ea typeface="Calibri" panose="020F0502020204030204" pitchFamily="34" charset="-122"/>
+                <a:cs typeface="Calibri" panose="020F0502020204030204" pitchFamily="34" charset="-120"/>
+              </a:rPr>
+              <a:t>Yatin</a:t>
+            </a:r>
+            <a:r>
+              <a:rPr lang="en-US" sz="1150" dirty="0">
+                <a:solidFill>
+                  <a:srgbClr val="CADCFC"/>
+                </a:solidFill>
+                <a:latin typeface="Calibri" panose="020F0502020204030204" pitchFamily="34" charset="0"/>
+                <a:ea typeface="Calibri" panose="020F0502020204030204" pitchFamily="34" charset="-122"/>
+                <a:cs typeface="Calibri" panose="020F0502020204030204" pitchFamily="34" charset="-120"/>
+              </a:rPr>
+              <a:t>  · </a:t>
+            </a:r>
+            <a:r>
+              <a:rPr lang="en-IN" altLang="en-US" sz="1150" dirty="0">
+                <a:solidFill>
+                  <a:srgbClr val="CADCFC"/>
+                </a:solidFill>
+                <a:latin typeface="Calibri" panose="020F0502020204030204" pitchFamily="34" charset="0"/>
+                <a:ea typeface="Calibri" panose="020F0502020204030204" pitchFamily="34" charset="-122"/>
+                <a:cs typeface="Calibri" panose="020F0502020204030204" pitchFamily="34" charset="-120"/>
+              </a:rPr>
+              <a:t> </a:t>
+            </a:r>
+            <a:r>
+              <a:rPr lang="en-US" sz="1150" dirty="0">
+                <a:solidFill>
+                  <a:srgbClr val="CADCFC"/>
+                </a:solidFill>
+                <a:latin typeface="Calibri" panose="020F0502020204030204" pitchFamily="34" charset="0"/>
+                <a:ea typeface="Calibri" panose="020F0502020204030204" pitchFamily="34" charset="-122"/>
+                <a:cs typeface="Calibri" panose="020F0502020204030204" pitchFamily="34" charset="-120"/>
+                <a:sym typeface="+mn-ea"/>
+              </a:rPr>
+              <a:t>Rishabh Shukla </a:t>
+            </a:r>
+            <a:endParaRPr lang="en-IN" altLang="en-US" sz="1150" dirty="0">
+              <a:solidFill>
+                <a:srgbClr val="CADCFC"/>
+              </a:solidFill>
+              <a:latin typeface="Calibri" panose="020F0502020204030204" pitchFamily="34" charset="0"/>
+              <a:ea typeface="Calibri" panose="020F0502020204030204" pitchFamily="34" charset="-122"/>
+              <a:cs typeface="Calibri" panose="020F0502020204030204" pitchFamily="34" charset="-120"/>
+            </a:endParaRPr>
           </a:p>
         </p:txBody>
       </p:sp>
@@ -1806,12 +1867,13 @@
 
 <file path=ppt/slides/slide2.xml><?xml version="1.0" encoding="utf-8"?>
 <p:sld xmlns:a="http://schemas.openxmlformats.org/drawingml/2006/main" xmlns:r="http://schemas.openxmlformats.org/officeDocument/2006/relationships" xmlns:p="http://schemas.openxmlformats.org/presentationml/2006/main">
-  <p:cSld name="Slide 2">
+  <p:cSld>
     <p:bg>
       <p:bgPr>
         <a:solidFill>
           <a:srgbClr val="FFFFFF"/>
         </a:solidFill>
+        <a:effectLst/>
       </p:bgPr>
     </p:bg>
     <p:spTree>
@@ -1843,23 +1905,22 @@
             <a:avLst/>
           </a:prstGeom>
           <a:noFill/>
-          <a:ln/>
-        </p:spPr>
-        <p:txBody>
-          <a:bodyPr wrap="square" rtlCol="0" anchor="ctr"/>
-          <a:lstStyle/>
-          <a:p>
-            <a:pPr indent="0" marL="0">
-              <a:buNone/>
-            </a:pPr>
-            <a:r>
-              <a:rPr lang="en-US" sz="1100" b="1" spc="200" kern="0" dirty="0">
+        </p:spPr>
+        <p:txBody>
+          <a:bodyPr wrap="square" rtlCol="0" anchor="ctr"/>
+          <a:lstStyle/>
+          <a:p>
+            <a:pPr marL="0" indent="0">
+              <a:buNone/>
+            </a:pPr>
+            <a:r>
+              <a:rPr lang="en-US" sz="1100" b="1" kern="0" spc="200" dirty="0">
                 <a:solidFill>
                   <a:srgbClr val="1E2761"/>
                 </a:solidFill>
-                <a:latin typeface="Calibri" pitchFamily="34" charset="0"/>
-                <a:ea typeface="Calibri" pitchFamily="34" charset="-122"/>
-                <a:cs typeface="Calibri" pitchFamily="34" charset="-120"/>
+                <a:latin typeface="Calibri" panose="020F0502020204030204" pitchFamily="34" charset="0"/>
+                <a:ea typeface="Calibri" panose="020F0502020204030204" pitchFamily="34" charset="-122"/>
+                <a:cs typeface="Calibri" panose="020F0502020204030204" pitchFamily="34" charset="-120"/>
               </a:rPr>
               <a:t>PROBLEM → SOLUTION</a:t>
             </a:r>
@@ -1882,13 +1943,12 @@
             <a:avLst/>
           </a:prstGeom>
           <a:noFill/>
-          <a:ln/>
-        </p:spPr>
-        <p:txBody>
-          <a:bodyPr wrap="square" rtlCol="0" anchor="ctr"/>
-          <a:lstStyle/>
-          <a:p>
-            <a:pPr indent="0" marL="0">
+        </p:spPr>
+        <p:txBody>
+          <a:bodyPr wrap="square" rtlCol="0" anchor="ctr"/>
+          <a:lstStyle/>
+          <a:p>
+            <a:pPr marL="0" indent="0">
               <a:buNone/>
             </a:pPr>
             <a:r>
@@ -1896,9 +1956,9 @@
                 <a:solidFill>
                   <a:srgbClr val="1B1F3B"/>
                 </a:solidFill>
-                <a:latin typeface="Cambria" pitchFamily="34" charset="0"/>
-                <a:ea typeface="Cambria" pitchFamily="34" charset="-122"/>
-                <a:cs typeface="Cambria" pitchFamily="34" charset="-120"/>
+                <a:latin typeface="Cambria" panose="02040503050406030204" pitchFamily="34" charset="0"/>
+                <a:ea typeface="Cambria" panose="02040503050406030204" pitchFamily="34" charset="-122"/>
+                <a:cs typeface="Cambria" panose="02040503050406030204" pitchFamily="34" charset="-120"/>
               </a:rPr>
               <a:t>From fragmented, reactive data to one predictive agent</a:t>
             </a:r>
@@ -1921,23 +1981,22 @@
             <a:avLst/>
           </a:prstGeom>
           <a:noFill/>
-          <a:ln/>
-        </p:spPr>
-        <p:txBody>
-          <a:bodyPr wrap="square" rtlCol="0" anchor="ctr"/>
-          <a:lstStyle/>
-          <a:p>
-            <a:pPr indent="0" marL="0">
-              <a:buNone/>
-            </a:pPr>
-            <a:r>
-              <a:rPr lang="en-US" sz="1100" b="1" spc="150" kern="0" dirty="0">
+        </p:spPr>
+        <p:txBody>
+          <a:bodyPr wrap="square" rtlCol="0" anchor="ctr"/>
+          <a:lstStyle/>
+          <a:p>
+            <a:pPr marL="0" indent="0">
+              <a:buNone/>
+            </a:pPr>
+            <a:r>
+              <a:rPr lang="en-US" sz="1100" b="1" kern="0" spc="150" dirty="0">
                 <a:solidFill>
                   <a:srgbClr val="C0392B"/>
                 </a:solidFill>
-                <a:latin typeface="Calibri" pitchFamily="34" charset="0"/>
-                <a:ea typeface="Calibri" pitchFamily="34" charset="-122"/>
-                <a:cs typeface="Calibri" pitchFamily="34" charset="-120"/>
+                <a:latin typeface="Calibri" panose="020F0502020204030204" pitchFamily="34" charset="0"/>
+                <a:ea typeface="Calibri" panose="020F0502020204030204" pitchFamily="34" charset="-122"/>
+                <a:cs typeface="Calibri" panose="020F0502020204030204" pitchFamily="34" charset="-120"/>
               </a:rPr>
               <a:t>THE PROBLEM</a:t>
             </a:r>
@@ -1962,7 +2021,6 @@
           <a:solidFill>
             <a:srgbClr val="C0392B"/>
           </a:solidFill>
-          <a:ln/>
         </p:spPr>
       </p:sp>
       <p:sp>
@@ -1980,13 +2038,12 @@
             <a:avLst/>
           </a:prstGeom>
           <a:noFill/>
-          <a:ln/>
-        </p:spPr>
-        <p:txBody>
-          <a:bodyPr wrap="square" rtlCol="0" anchor="ctr"/>
-          <a:lstStyle/>
-          <a:p>
-            <a:pPr algn="ctr" indent="0" marL="0">
+        </p:spPr>
+        <p:txBody>
+          <a:bodyPr wrap="square" rtlCol="0" anchor="ctr"/>
+          <a:lstStyle/>
+          <a:p>
+            <a:pPr marL="0" indent="0" algn="ctr">
               <a:buNone/>
             </a:pPr>
             <a:r>
@@ -1994,9 +2051,9 @@
                 <a:solidFill>
                   <a:srgbClr val="FFFFFF"/>
                 </a:solidFill>
-                <a:latin typeface="Calibri" pitchFamily="34" charset="0"/>
-                <a:ea typeface="Calibri" pitchFamily="34" charset="-122"/>
-                <a:cs typeface="Calibri" pitchFamily="34" charset="-120"/>
+                <a:latin typeface="Calibri" panose="020F0502020204030204" pitchFamily="34" charset="0"/>
+                <a:ea typeface="Calibri" panose="020F0502020204030204" pitchFamily="34" charset="-122"/>
+                <a:cs typeface="Calibri" panose="020F0502020204030204" pitchFamily="34" charset="-120"/>
               </a:rPr>
               <a:t>1</a:t>
             </a:r>
@@ -2019,13 +2076,12 @@
             <a:avLst/>
           </a:prstGeom>
           <a:noFill/>
-          <a:ln/>
-        </p:spPr>
-        <p:txBody>
-          <a:bodyPr wrap="square" rtlCol="0" anchor="ctr"/>
-          <a:lstStyle/>
-          <a:p>
-            <a:pPr indent="0" marL="0">
+        </p:spPr>
+        <p:txBody>
+          <a:bodyPr wrap="square" rtlCol="0" anchor="ctr"/>
+          <a:lstStyle/>
+          <a:p>
+            <a:pPr marL="0" indent="0">
               <a:buNone/>
             </a:pPr>
             <a:r>
@@ -2033,9 +2089,9 @@
                 <a:solidFill>
                   <a:srgbClr val="1B1F3B"/>
                 </a:solidFill>
-                <a:latin typeface="Calibri" pitchFamily="34" charset="0"/>
-                <a:ea typeface="Calibri" pitchFamily="34" charset="-122"/>
-                <a:cs typeface="Calibri" pitchFamily="34" charset="-120"/>
+                <a:latin typeface="Calibri" panose="020F0502020204030204" pitchFamily="34" charset="0"/>
+                <a:ea typeface="Calibri" panose="020F0502020204030204" pitchFamily="34" charset="-122"/>
+                <a:cs typeface="Calibri" panose="020F0502020204030204" pitchFamily="34" charset="-120"/>
               </a:rPr>
               <a:t>Fragmented data</a:t>
             </a:r>
@@ -2058,13 +2114,12 @@
             <a:avLst/>
           </a:prstGeom>
           <a:noFill/>
-          <a:ln/>
-        </p:spPr>
-        <p:txBody>
-          <a:bodyPr wrap="square" rtlCol="0" anchor="ctr"/>
-          <a:lstStyle/>
-          <a:p>
-            <a:pPr indent="0" marL="0">
+        </p:spPr>
+        <p:txBody>
+          <a:bodyPr wrap="square" rtlCol="0" anchor="ctr"/>
+          <a:lstStyle/>
+          <a:p>
+            <a:pPr marL="0" indent="0">
               <a:lnSpc>
                 <a:spcPct val="115000"/>
               </a:lnSpc>
@@ -2075,9 +2130,9 @@
                 <a:solidFill>
                   <a:srgbClr val="6B7280"/>
                 </a:solidFill>
-                <a:latin typeface="Calibri" pitchFamily="34" charset="0"/>
-                <a:ea typeface="Calibri" pitchFamily="34" charset="-122"/>
-                <a:cs typeface="Calibri" pitchFamily="34" charset="-120"/>
+                <a:latin typeface="Calibri" panose="020F0502020204030204" pitchFamily="34" charset="0"/>
+                <a:ea typeface="Calibri" panose="020F0502020204030204" pitchFamily="34" charset="-122"/>
+                <a:cs typeface="Calibri" panose="020F0502020204030204" pitchFamily="34" charset="-120"/>
               </a:rPr>
               <a:t>Telemetry, manufacturing, and supplier data sit in silos — no view connects a failure to its origin.</a:t>
             </a:r>
@@ -2102,7 +2157,6 @@
           <a:solidFill>
             <a:srgbClr val="C0392B"/>
           </a:solidFill>
-          <a:ln/>
         </p:spPr>
       </p:sp>
       <p:sp>
@@ -2120,13 +2174,12 @@
             <a:avLst/>
           </a:prstGeom>
           <a:noFill/>
-          <a:ln/>
-        </p:spPr>
-        <p:txBody>
-          <a:bodyPr wrap="square" rtlCol="0" anchor="ctr"/>
-          <a:lstStyle/>
-          <a:p>
-            <a:pPr algn="ctr" indent="0" marL="0">
+        </p:spPr>
+        <p:txBody>
+          <a:bodyPr wrap="square" rtlCol="0" anchor="ctr"/>
+          <a:lstStyle/>
+          <a:p>
+            <a:pPr marL="0" indent="0" algn="ctr">
               <a:buNone/>
             </a:pPr>
             <a:r>
@@ -2134,9 +2187,9 @@
                 <a:solidFill>
                   <a:srgbClr val="FFFFFF"/>
                 </a:solidFill>
-                <a:latin typeface="Calibri" pitchFamily="34" charset="0"/>
-                <a:ea typeface="Calibri" pitchFamily="34" charset="-122"/>
-                <a:cs typeface="Calibri" pitchFamily="34" charset="-120"/>
+                <a:latin typeface="Calibri" panose="020F0502020204030204" pitchFamily="34" charset="0"/>
+                <a:ea typeface="Calibri" panose="020F0502020204030204" pitchFamily="34" charset="-122"/>
+                <a:cs typeface="Calibri" panose="020F0502020204030204" pitchFamily="34" charset="-120"/>
               </a:rPr>
               <a:t>2</a:t>
             </a:r>
@@ -2159,13 +2212,12 @@
             <a:avLst/>
           </a:prstGeom>
           <a:noFill/>
-          <a:ln/>
-        </p:spPr>
-        <p:txBody>
-          <a:bodyPr wrap="square" rtlCol="0" anchor="ctr"/>
-          <a:lstStyle/>
-          <a:p>
-            <a:pPr indent="0" marL="0">
+        </p:spPr>
+        <p:txBody>
+          <a:bodyPr wrap="square" rtlCol="0" anchor="ctr"/>
+          <a:lstStyle/>
+          <a:p>
+            <a:pPr marL="0" indent="0">
               <a:buNone/>
             </a:pPr>
             <a:r>
@@ -2173,9 +2225,9 @@
                 <a:solidFill>
                   <a:srgbClr val="1B1F3B"/>
                 </a:solidFill>
-                <a:latin typeface="Calibri" pitchFamily="34" charset="0"/>
-                <a:ea typeface="Calibri" pitchFamily="34" charset="-122"/>
-                <a:cs typeface="Calibri" pitchFamily="34" charset="-120"/>
+                <a:latin typeface="Calibri" panose="020F0502020204030204" pitchFamily="34" charset="0"/>
+                <a:ea typeface="Calibri" panose="020F0502020204030204" pitchFamily="34" charset="-122"/>
+                <a:cs typeface="Calibri" panose="020F0502020204030204" pitchFamily="34" charset="-120"/>
               </a:rPr>
               <a:t>Reactive, not proactive</a:t>
             </a:r>
@@ -2198,13 +2250,12 @@
             <a:avLst/>
           </a:prstGeom>
           <a:noFill/>
-          <a:ln/>
-        </p:spPr>
-        <p:txBody>
-          <a:bodyPr wrap="square" rtlCol="0" anchor="ctr"/>
-          <a:lstStyle/>
-          <a:p>
-            <a:pPr indent="0" marL="0">
+        </p:spPr>
+        <p:txBody>
+          <a:bodyPr wrap="square" rtlCol="0" anchor="ctr"/>
+          <a:lstStyle/>
+          <a:p>
+            <a:pPr marL="0" indent="0">
               <a:lnSpc>
                 <a:spcPct val="115000"/>
               </a:lnSpc>
@@ -2215,9 +2266,9 @@
                 <a:solidFill>
                   <a:srgbClr val="6B7280"/>
                 </a:solidFill>
-                <a:latin typeface="Calibri" pitchFamily="34" charset="0"/>
-                <a:ea typeface="Calibri" pitchFamily="34" charset="-122"/>
-                <a:cs typeface="Calibri" pitchFamily="34" charset="-120"/>
+                <a:latin typeface="Calibri" panose="020F0502020204030204" pitchFamily="34" charset="0"/>
+                <a:ea typeface="Calibri" panose="020F0502020204030204" pitchFamily="34" charset="-122"/>
+                <a:cs typeface="Calibri" panose="020F0502020204030204" pitchFamily="34" charset="-120"/>
               </a:rPr>
               <a:t>Issues are investigated only after customers report them, once cost and brand damage are locked in.</a:t>
             </a:r>
@@ -2242,7 +2293,6 @@
           <a:solidFill>
             <a:srgbClr val="C0392B"/>
           </a:solidFill>
-          <a:ln/>
         </p:spPr>
       </p:sp>
       <p:sp>
@@ -2260,13 +2310,12 @@
             <a:avLst/>
           </a:prstGeom>
           <a:noFill/>
-          <a:ln/>
-        </p:spPr>
-        <p:txBody>
-          <a:bodyPr wrap="square" rtlCol="0" anchor="ctr"/>
-          <a:lstStyle/>
-          <a:p>
-            <a:pPr algn="ctr" indent="0" marL="0">
+        </p:spPr>
+        <p:txBody>
+          <a:bodyPr wrap="square" rtlCol="0" anchor="ctr"/>
+          <a:lstStyle/>
+          <a:p>
+            <a:pPr marL="0" indent="0" algn="ctr">
               <a:buNone/>
             </a:pPr>
             <a:r>
@@ -2274,9 +2323,9 @@
                 <a:solidFill>
                   <a:srgbClr val="FFFFFF"/>
                 </a:solidFill>
-                <a:latin typeface="Calibri" pitchFamily="34" charset="0"/>
-                <a:ea typeface="Calibri" pitchFamily="34" charset="-122"/>
-                <a:cs typeface="Calibri" pitchFamily="34" charset="-120"/>
+                <a:latin typeface="Calibri" panose="020F0502020204030204" pitchFamily="34" charset="0"/>
+                <a:ea typeface="Calibri" panose="020F0502020204030204" pitchFamily="34" charset="-122"/>
+                <a:cs typeface="Calibri" panose="020F0502020204030204" pitchFamily="34" charset="-120"/>
               </a:rPr>
               <a:t>3</a:t>
             </a:r>
@@ -2299,13 +2348,12 @@
             <a:avLst/>
           </a:prstGeom>
           <a:noFill/>
-          <a:ln/>
-        </p:spPr>
-        <p:txBody>
-          <a:bodyPr wrap="square" rtlCol="0" anchor="ctr"/>
-          <a:lstStyle/>
-          <a:p>
-            <a:pPr indent="0" marL="0">
+        </p:spPr>
+        <p:txBody>
+          <a:bodyPr wrap="square" rtlCol="0" anchor="ctr"/>
+          <a:lstStyle/>
+          <a:p>
+            <a:pPr marL="0" indent="0">
               <a:buNone/>
             </a:pPr>
             <a:r>
@@ -2313,9 +2361,9 @@
                 <a:solidFill>
                   <a:srgbClr val="1B1F3B"/>
                 </a:solidFill>
-                <a:latin typeface="Calibri" pitchFamily="34" charset="0"/>
-                <a:ea typeface="Calibri" pitchFamily="34" charset="-122"/>
-                <a:cs typeface="Calibri" pitchFamily="34" charset="-120"/>
+                <a:latin typeface="Calibri" panose="020F0502020204030204" pitchFamily="34" charset="0"/>
+                <a:ea typeface="Calibri" panose="020F0502020204030204" pitchFamily="34" charset="-122"/>
+                <a:cs typeface="Calibri" panose="020F0502020204030204" pitchFamily="34" charset="-120"/>
               </a:rPr>
               <a:t>No forward-looking view</a:t>
             </a:r>
@@ -2338,13 +2386,12 @@
             <a:avLst/>
           </a:prstGeom>
           <a:noFill/>
-          <a:ln/>
-        </p:spPr>
-        <p:txBody>
-          <a:bodyPr wrap="square" rtlCol="0" anchor="ctr"/>
-          <a:lstStyle/>
-          <a:p>
-            <a:pPr indent="0" marL="0">
+        </p:spPr>
+        <p:txBody>
+          <a:bodyPr wrap="square" rtlCol="0" anchor="ctr"/>
+          <a:lstStyle/>
+          <a:p>
+            <a:pPr marL="0" indent="0">
               <a:lnSpc>
                 <a:spcPct val="115000"/>
               </a:lnSpc>
@@ -2355,9 +2402,9 @@
                 <a:solidFill>
                   <a:srgbClr val="6B7280"/>
                 </a:solidFill>
-                <a:latin typeface="Calibri" pitchFamily="34" charset="0"/>
-                <a:ea typeface="Calibri" pitchFamily="34" charset="-122"/>
-                <a:cs typeface="Calibri" pitchFamily="34" charset="-120"/>
+                <a:latin typeface="Calibri" panose="020F0502020204030204" pitchFamily="34" charset="0"/>
+                <a:ea typeface="Calibri" panose="020F0502020204030204" pitchFamily="34" charset="-122"/>
+                <a:cs typeface="Calibri" panose="020F0502020204030204" pitchFamily="34" charset="-120"/>
               </a:rPr>
               <a:t>Teams can't prioritize which parts or suppliers to fix next without a 30-day forecast.</a:t>
             </a:r>
@@ -2403,23 +2450,22 @@
             <a:avLst/>
           </a:prstGeom>
           <a:noFill/>
-          <a:ln/>
-        </p:spPr>
-        <p:txBody>
-          <a:bodyPr wrap="square" rtlCol="0" anchor="ctr"/>
-          <a:lstStyle/>
-          <a:p>
-            <a:pPr indent="0" marL="0">
-              <a:buNone/>
-            </a:pPr>
-            <a:r>
-              <a:rPr lang="en-US" sz="1100" b="1" spc="150" kern="0" dirty="0">
+        </p:spPr>
+        <p:txBody>
+          <a:bodyPr wrap="square" rtlCol="0" anchor="ctr"/>
+          <a:lstStyle/>
+          <a:p>
+            <a:pPr marL="0" indent="0">
+              <a:buNone/>
+            </a:pPr>
+            <a:r>
+              <a:rPr lang="en-US" sz="1100" b="1" kern="0" spc="150" dirty="0">
                 <a:solidFill>
                   <a:srgbClr val="1E8F5F"/>
                 </a:solidFill>
-                <a:latin typeface="Calibri" pitchFamily="34" charset="0"/>
-                <a:ea typeface="Calibri" pitchFamily="34" charset="-122"/>
-                <a:cs typeface="Calibri" pitchFamily="34" charset="-120"/>
+                <a:latin typeface="Calibri" panose="020F0502020204030204" pitchFamily="34" charset="0"/>
+                <a:ea typeface="Calibri" panose="020F0502020204030204" pitchFamily="34" charset="-122"/>
+                <a:cs typeface="Calibri" panose="020F0502020204030204" pitchFamily="34" charset="-120"/>
               </a:rPr>
               <a:t>OUR SOLUTION</a:t>
             </a:r>
@@ -2444,7 +2490,6 @@
           <a:solidFill>
             <a:srgbClr val="1E2761"/>
           </a:solidFill>
-          <a:ln/>
         </p:spPr>
       </p:sp>
       <p:sp>
@@ -2462,13 +2507,12 @@
             <a:avLst/>
           </a:prstGeom>
           <a:noFill/>
-          <a:ln/>
-        </p:spPr>
-        <p:txBody>
-          <a:bodyPr wrap="square" rtlCol="0" anchor="ctr"/>
-          <a:lstStyle/>
-          <a:p>
-            <a:pPr algn="ctr" indent="0" marL="0">
+        </p:spPr>
+        <p:txBody>
+          <a:bodyPr wrap="square" rtlCol="0" anchor="ctr"/>
+          <a:lstStyle/>
+          <a:p>
+            <a:pPr marL="0" indent="0" algn="ctr">
               <a:buNone/>
             </a:pPr>
             <a:r>
@@ -2476,9 +2520,9 @@
                 <a:solidFill>
                   <a:srgbClr val="FFFFFF"/>
                 </a:solidFill>
-                <a:latin typeface="Calibri" pitchFamily="34" charset="0"/>
-                <a:ea typeface="Calibri" pitchFamily="34" charset="-122"/>
-                <a:cs typeface="Calibri" pitchFamily="34" charset="-120"/>
+                <a:latin typeface="Calibri" panose="020F0502020204030204" pitchFamily="34" charset="0"/>
+                <a:ea typeface="Calibri" panose="020F0502020204030204" pitchFamily="34" charset="-122"/>
+                <a:cs typeface="Calibri" panose="020F0502020204030204" pitchFamily="34" charset="-120"/>
               </a:rPr>
               <a:t>1</a:t>
             </a:r>
@@ -2501,13 +2545,12 @@
             <a:avLst/>
           </a:prstGeom>
           <a:noFill/>
-          <a:ln/>
-        </p:spPr>
-        <p:txBody>
-          <a:bodyPr wrap="square" rtlCol="0" anchor="ctr"/>
-          <a:lstStyle/>
-          <a:p>
-            <a:pPr indent="0" marL="0">
+        </p:spPr>
+        <p:txBody>
+          <a:bodyPr wrap="square" rtlCol="0" anchor="ctr"/>
+          <a:lstStyle/>
+          <a:p>
+            <a:pPr marL="0" indent="0">
               <a:buNone/>
             </a:pPr>
             <a:r>
@@ -2515,9 +2558,9 @@
                 <a:solidFill>
                   <a:srgbClr val="1B1F3B"/>
                 </a:solidFill>
-                <a:latin typeface="Calibri" pitchFamily="34" charset="0"/>
-                <a:ea typeface="Calibri" pitchFamily="34" charset="-122"/>
-                <a:cs typeface="Calibri" pitchFamily="34" charset="-120"/>
+                <a:latin typeface="Calibri" panose="020F0502020204030204" pitchFamily="34" charset="0"/>
+                <a:ea typeface="Calibri" panose="020F0502020204030204" pitchFamily="34" charset="-122"/>
+                <a:cs typeface="Calibri" panose="020F0502020204030204" pitchFamily="34" charset="-120"/>
               </a:rPr>
               <a:t>Quality Monitoring</a:t>
             </a:r>
@@ -2540,13 +2583,12 @@
             <a:avLst/>
           </a:prstGeom>
           <a:noFill/>
-          <a:ln/>
-        </p:spPr>
-        <p:txBody>
-          <a:bodyPr wrap="square" rtlCol="0" anchor="ctr"/>
-          <a:lstStyle/>
-          <a:p>
-            <a:pPr indent="0" marL="0">
+        </p:spPr>
+        <p:txBody>
+          <a:bodyPr wrap="square" rtlCol="0" anchor="ctr"/>
+          <a:lstStyle/>
+          <a:p>
+            <a:pPr marL="0" indent="0">
               <a:lnSpc>
                 <a:spcPct val="115000"/>
               </a:lnSpc>
@@ -2557,9 +2599,9 @@
                 <a:solidFill>
                   <a:srgbClr val="6B7280"/>
                 </a:solidFill>
-                <a:latin typeface="Calibri" pitchFamily="34" charset="0"/>
-                <a:ea typeface="Calibri" pitchFamily="34" charset="-122"/>
-                <a:cs typeface="Calibri" pitchFamily="34" charset="-120"/>
+                <a:latin typeface="Calibri" panose="020F0502020204030204" pitchFamily="34" charset="0"/>
+                <a:ea typeface="Calibri" panose="020F0502020204030204" pitchFamily="34" charset="-122"/>
+                <a:cs typeface="Calibri" panose="020F0502020204030204" pitchFamily="34" charset="-120"/>
               </a:rPr>
               <a:t>Detects anomaly patterns — where failures cluster across parts, suppliers, chemistries.</a:t>
             </a:r>
@@ -2584,7 +2626,6 @@
           <a:solidFill>
             <a:srgbClr val="3D5AA8"/>
           </a:solidFill>
-          <a:ln/>
         </p:spPr>
       </p:sp>
       <p:sp>
@@ -2602,13 +2643,12 @@
             <a:avLst/>
           </a:prstGeom>
           <a:noFill/>
-          <a:ln/>
-        </p:spPr>
-        <p:txBody>
-          <a:bodyPr wrap="square" rtlCol="0" anchor="ctr"/>
-          <a:lstStyle/>
-          <a:p>
-            <a:pPr algn="ctr" indent="0" marL="0">
+        </p:spPr>
+        <p:txBody>
+          <a:bodyPr wrap="square" rtlCol="0" anchor="ctr"/>
+          <a:lstStyle/>
+          <a:p>
+            <a:pPr marL="0" indent="0" algn="ctr">
               <a:buNone/>
             </a:pPr>
             <a:r>
@@ -2616,9 +2656,9 @@
                 <a:solidFill>
                   <a:srgbClr val="FFFFFF"/>
                 </a:solidFill>
-                <a:latin typeface="Calibri" pitchFamily="34" charset="0"/>
-                <a:ea typeface="Calibri" pitchFamily="34" charset="-122"/>
-                <a:cs typeface="Calibri" pitchFamily="34" charset="-120"/>
+                <a:latin typeface="Calibri" panose="020F0502020204030204" pitchFamily="34" charset="0"/>
+                <a:ea typeface="Calibri" panose="020F0502020204030204" pitchFamily="34" charset="-122"/>
+                <a:cs typeface="Calibri" panose="020F0502020204030204" pitchFamily="34" charset="-120"/>
               </a:rPr>
               <a:t>2</a:t>
             </a:r>
@@ -2641,13 +2681,12 @@
             <a:avLst/>
           </a:prstGeom>
           <a:noFill/>
-          <a:ln/>
-        </p:spPr>
-        <p:txBody>
-          <a:bodyPr wrap="square" rtlCol="0" anchor="ctr"/>
-          <a:lstStyle/>
-          <a:p>
-            <a:pPr indent="0" marL="0">
+        </p:spPr>
+        <p:txBody>
+          <a:bodyPr wrap="square" rtlCol="0" anchor="ctr"/>
+          <a:lstStyle/>
+          <a:p>
+            <a:pPr marL="0" indent="0">
               <a:buNone/>
             </a:pPr>
             <a:r>
@@ -2655,9 +2694,9 @@
                 <a:solidFill>
                   <a:srgbClr val="1B1F3B"/>
                 </a:solidFill>
-                <a:latin typeface="Calibri" pitchFamily="34" charset="0"/>
-                <a:ea typeface="Calibri" pitchFamily="34" charset="-122"/>
-                <a:cs typeface="Calibri" pitchFamily="34" charset="-120"/>
+                <a:latin typeface="Calibri" panose="020F0502020204030204" pitchFamily="34" charset="0"/>
+                <a:ea typeface="Calibri" panose="020F0502020204030204" pitchFamily="34" charset="-122"/>
+                <a:cs typeface="Calibri" panose="020F0502020204030204" pitchFamily="34" charset="-120"/>
               </a:rPr>
               <a:t>Root Cause Analysis</a:t>
             </a:r>
@@ -2680,13 +2719,12 @@
             <a:avLst/>
           </a:prstGeom>
           <a:noFill/>
-          <a:ln/>
-        </p:spPr>
-        <p:txBody>
-          <a:bodyPr wrap="square" rtlCol="0" anchor="ctr"/>
-          <a:lstStyle/>
-          <a:p>
-            <a:pPr indent="0" marL="0">
+        </p:spPr>
+        <p:txBody>
+          <a:bodyPr wrap="square" rtlCol="0" anchor="ctr"/>
+          <a:lstStyle/>
+          <a:p>
+            <a:pPr marL="0" indent="0">
               <a:lnSpc>
                 <a:spcPct val="115000"/>
               </a:lnSpc>
@@ -2697,9 +2735,9 @@
                 <a:solidFill>
                   <a:srgbClr val="6B7280"/>
                 </a:solidFill>
-                <a:latin typeface="Calibri" pitchFamily="34" charset="0"/>
-                <a:ea typeface="Calibri" pitchFamily="34" charset="-122"/>
-                <a:cs typeface="Calibri" pitchFamily="34" charset="-120"/>
+                <a:latin typeface="Calibri" panose="020F0502020204030204" pitchFamily="34" charset="0"/>
+                <a:ea typeface="Calibri" panose="020F0502020204030204" pitchFamily="34" charset="-122"/>
+                <a:cs typeface="Calibri" panose="020F0502020204030204" pitchFamily="34" charset="-120"/>
               </a:rPr>
               <a:t>Traces failures across part → supplier → chemistry → DTC code, connecting every dimension.</a:t>
             </a:r>
@@ -2724,7 +2762,6 @@
           <a:solidFill>
             <a:srgbClr val="1E8F5F"/>
           </a:solidFill>
-          <a:ln/>
         </p:spPr>
       </p:sp>
       <p:sp>
@@ -2742,13 +2779,12 @@
             <a:avLst/>
           </a:prstGeom>
           <a:noFill/>
-          <a:ln/>
-        </p:spPr>
-        <p:txBody>
-          <a:bodyPr wrap="square" rtlCol="0" anchor="ctr"/>
-          <a:lstStyle/>
-          <a:p>
-            <a:pPr algn="ctr" indent="0" marL="0">
+        </p:spPr>
+        <p:txBody>
+          <a:bodyPr wrap="square" rtlCol="0" anchor="ctr"/>
+          <a:lstStyle/>
+          <a:p>
+            <a:pPr marL="0" indent="0" algn="ctr">
               <a:buNone/>
             </a:pPr>
             <a:r>
@@ -2756,9 +2792,9 @@
                 <a:solidFill>
                   <a:srgbClr val="FFFFFF"/>
                 </a:solidFill>
-                <a:latin typeface="Calibri" pitchFamily="34" charset="0"/>
-                <a:ea typeface="Calibri" pitchFamily="34" charset="-122"/>
-                <a:cs typeface="Calibri" pitchFamily="34" charset="-120"/>
+                <a:latin typeface="Calibri" panose="020F0502020204030204" pitchFamily="34" charset="0"/>
+                <a:ea typeface="Calibri" panose="020F0502020204030204" pitchFamily="34" charset="-122"/>
+                <a:cs typeface="Calibri" panose="020F0502020204030204" pitchFamily="34" charset="-120"/>
               </a:rPr>
               <a:t>3</a:t>
             </a:r>
@@ -2781,13 +2817,12 @@
             <a:avLst/>
           </a:prstGeom>
           <a:noFill/>
-          <a:ln/>
-        </p:spPr>
-        <p:txBody>
-          <a:bodyPr wrap="square" rtlCol="0" anchor="ctr"/>
-          <a:lstStyle/>
-          <a:p>
-            <a:pPr indent="0" marL="0">
+        </p:spPr>
+        <p:txBody>
+          <a:bodyPr wrap="square" rtlCol="0" anchor="ctr"/>
+          <a:lstStyle/>
+          <a:p>
+            <a:pPr marL="0" indent="0">
               <a:buNone/>
             </a:pPr>
             <a:r>
@@ -2795,9 +2830,9 @@
                 <a:solidFill>
                   <a:srgbClr val="1B1F3B"/>
                 </a:solidFill>
-                <a:latin typeface="Calibri" pitchFamily="34" charset="0"/>
-                <a:ea typeface="Calibri" pitchFamily="34" charset="-122"/>
-                <a:cs typeface="Calibri" pitchFamily="34" charset="-120"/>
+                <a:latin typeface="Calibri" panose="020F0502020204030204" pitchFamily="34" charset="0"/>
+                <a:ea typeface="Calibri" panose="020F0502020204030204" pitchFamily="34" charset="-122"/>
+                <a:cs typeface="Calibri" panose="020F0502020204030204" pitchFamily="34" charset="-120"/>
               </a:rPr>
               <a:t>Predictive Maintenance</a:t>
             </a:r>
@@ -2820,13 +2855,12 @@
             <a:avLst/>
           </a:prstGeom>
           <a:noFill/>
-          <a:ln/>
-        </p:spPr>
-        <p:txBody>
-          <a:bodyPr wrap="square" rtlCol="0" anchor="ctr"/>
-          <a:lstStyle/>
-          <a:p>
-            <a:pPr indent="0" marL="0">
+        </p:spPr>
+        <p:txBody>
+          <a:bodyPr wrap="square" rtlCol="0" anchor="ctr"/>
+          <a:lstStyle/>
+          <a:p>
+            <a:pPr marL="0" indent="0">
               <a:lnSpc>
                 <a:spcPct val="115000"/>
               </a:lnSpc>
@@ -2837,9 +2871,9 @@
                 <a:solidFill>
                   <a:srgbClr val="6B7280"/>
                 </a:solidFill>
-                <a:latin typeface="Calibri" pitchFamily="34" charset="0"/>
-                <a:ea typeface="Calibri" pitchFamily="34" charset="-122"/>
-                <a:cs typeface="Calibri" pitchFamily="34" charset="-120"/>
+                <a:latin typeface="Calibri" panose="020F0502020204030204" pitchFamily="34" charset="0"/>
+                <a:ea typeface="Calibri" panose="020F0502020204030204" pitchFamily="34" charset="-122"/>
+                <a:cs typeface="Calibri" panose="020F0502020204030204" pitchFamily="34" charset="-120"/>
               </a:rPr>
               <a:t>Forecasts the next 30 days of failures with 95% confidence intervals, at every granularity.</a:t>
             </a:r>
@@ -2889,13 +2923,12 @@
             <a:avLst/>
           </a:prstGeom>
           <a:noFill/>
-          <a:ln/>
-        </p:spPr>
-        <p:txBody>
-          <a:bodyPr wrap="square" rtlCol="0" anchor="ctr"/>
-          <a:lstStyle/>
-          <a:p>
-            <a:pPr algn="ctr" indent="0" marL="0">
+        </p:spPr>
+        <p:txBody>
+          <a:bodyPr wrap="square" rtlCol="0" anchor="ctr"/>
+          <a:lstStyle/>
+          <a:p>
+            <a:pPr marL="0" indent="0" algn="ctr">
               <a:lnSpc>
                 <a:spcPct val="120000"/>
               </a:lnSpc>
@@ -2906,9 +2939,9 @@
                 <a:solidFill>
                   <a:srgbClr val="1E2761"/>
                 </a:solidFill>
-                <a:latin typeface="Calibri" pitchFamily="34" charset="0"/>
-                <a:ea typeface="Calibri" pitchFamily="34" charset="-122"/>
-                <a:cs typeface="Calibri" pitchFamily="34" charset="-120"/>
+                <a:latin typeface="Calibri" panose="020F0502020204030204" pitchFamily="34" charset="0"/>
+                <a:ea typeface="Calibri" panose="020F0502020204030204" pitchFamily="34" charset="-122"/>
+                <a:cs typeface="Calibri" panose="020F0502020204030204" pitchFamily="34" charset="-120"/>
               </a:rPr>
               <a:t>One unified Cortex Agent delivers all three capabilities through a single conversational interface.</a:t>
             </a:r>
@@ -2931,13 +2964,12 @@
             <a:avLst/>
           </a:prstGeom>
           <a:noFill/>
-          <a:ln/>
-        </p:spPr>
-        <p:txBody>
-          <a:bodyPr wrap="square" rtlCol="0" anchor="ctr"/>
-          <a:lstStyle/>
-          <a:p>
-            <a:pPr indent="0" marL="0">
+        </p:spPr>
+        <p:txBody>
+          <a:bodyPr wrap="square" rtlCol="0" anchor="ctr"/>
+          <a:lstStyle/>
+          <a:p>
+            <a:pPr marL="0" indent="0">
               <a:buNone/>
             </a:pPr>
             <a:r>
@@ -2945,11 +2977,33 @@
                 <a:solidFill>
                   <a:srgbClr val="6B7280"/>
                 </a:solidFill>
-                <a:latin typeface="Calibri" pitchFamily="34" charset="0"/>
-                <a:ea typeface="Calibri" pitchFamily="34" charset="-122"/>
-                <a:cs typeface="Calibri" pitchFamily="34" charset="-120"/>
-              </a:rPr>
-              <a:t>Team VoltGuard  |  Vehicle Quality RCA Platform  |  Snowflake × Capgemini Hackathon 2026</a:t>
+                <a:latin typeface="Calibri" panose="020F0502020204030204" pitchFamily="34" charset="0"/>
+                <a:ea typeface="Calibri" panose="020F0502020204030204" pitchFamily="34" charset="-122"/>
+                <a:cs typeface="Calibri" panose="020F0502020204030204" pitchFamily="34" charset="-120"/>
+              </a:rPr>
+              <a:t>Team </a:t>
+            </a:r>
+            <a:r>
+              <a:rPr lang="en-IN" altLang="en-US" sz="850" dirty="0">
+                <a:solidFill>
+                  <a:srgbClr val="6B7280"/>
+                </a:solidFill>
+                <a:latin typeface="Calibri" panose="020F0502020204030204" pitchFamily="34" charset="0"/>
+                <a:ea typeface="Calibri" panose="020F0502020204030204" pitchFamily="34" charset="-122"/>
+                <a:cs typeface="Calibri" panose="020F0502020204030204" pitchFamily="34" charset="-120"/>
+              </a:rPr>
+              <a:t>The Snow Coders </a:t>
+            </a:r>
+            <a:r>
+              <a:rPr lang="en-US" sz="850" dirty="0">
+                <a:solidFill>
+                  <a:srgbClr val="6B7280"/>
+                </a:solidFill>
+                <a:latin typeface="Calibri" panose="020F0502020204030204" pitchFamily="34" charset="0"/>
+                <a:ea typeface="Calibri" panose="020F0502020204030204" pitchFamily="34" charset="-122"/>
+                <a:cs typeface="Calibri" panose="020F0502020204030204" pitchFamily="34" charset="-120"/>
+              </a:rPr>
+              <a:t>|  Vehicle Quality RCA Platform  |  Snowflake × Capgemini Hackathon 2026</a:t>
             </a:r>
             <a:endParaRPr lang="en-US" sz="850" dirty="0"/>
           </a:p>
@@ -2965,12 +3019,13 @@
 
 <file path=ppt/slides/slide3.xml><?xml version="1.0" encoding="utf-8"?>
 <p:sld xmlns:a="http://schemas.openxmlformats.org/drawingml/2006/main" xmlns:r="http://schemas.openxmlformats.org/officeDocument/2006/relationships" xmlns:p="http://schemas.openxmlformats.org/presentationml/2006/main">
-  <p:cSld name="Slide 3">
+  <p:cSld>
     <p:bg>
       <p:bgPr>
         <a:solidFill>
           <a:srgbClr val="FFFFFF"/>
         </a:solidFill>
+        <a:effectLst/>
       </p:bgPr>
     </p:bg>
     <p:spTree>
@@ -3002,23 +3057,22 @@
             <a:avLst/>
           </a:prstGeom>
           <a:noFill/>
-          <a:ln/>
-        </p:spPr>
-        <p:txBody>
-          <a:bodyPr wrap="square" rtlCol="0" anchor="ctr"/>
-          <a:lstStyle/>
-          <a:p>
-            <a:pPr indent="0" marL="0">
-              <a:buNone/>
-            </a:pPr>
-            <a:r>
-              <a:rPr lang="en-US" sz="1100" b="1" spc="200" kern="0" dirty="0">
+        </p:spPr>
+        <p:txBody>
+          <a:bodyPr wrap="square" rtlCol="0" anchor="ctr"/>
+          <a:lstStyle/>
+          <a:p>
+            <a:pPr marL="0" indent="0">
+              <a:buNone/>
+            </a:pPr>
+            <a:r>
+              <a:rPr lang="en-US" sz="1100" b="1" kern="0" spc="200" dirty="0">
                 <a:solidFill>
                   <a:srgbClr val="1E2761"/>
                 </a:solidFill>
-                <a:latin typeface="Calibri" pitchFamily="34" charset="0"/>
-                <a:ea typeface="Calibri" pitchFamily="34" charset="-122"/>
-                <a:cs typeface="Calibri" pitchFamily="34" charset="-120"/>
+                <a:latin typeface="Calibri" panose="020F0502020204030204" pitchFamily="34" charset="0"/>
+                <a:ea typeface="Calibri" panose="020F0502020204030204" pitchFamily="34" charset="-122"/>
+                <a:cs typeface="Calibri" panose="020F0502020204030204" pitchFamily="34" charset="-120"/>
               </a:rPr>
               <a:t>ARCHITECTURE</a:t>
             </a:r>
@@ -3041,13 +3095,12 @@
             <a:avLst/>
           </a:prstGeom>
           <a:noFill/>
-          <a:ln/>
-        </p:spPr>
-        <p:txBody>
-          <a:bodyPr wrap="square" rtlCol="0" anchor="ctr"/>
-          <a:lstStyle/>
-          <a:p>
-            <a:pPr indent="0" marL="0">
+        </p:spPr>
+        <p:txBody>
+          <a:bodyPr wrap="square" rtlCol="0" anchor="ctr"/>
+          <a:lstStyle/>
+          <a:p>
+            <a:pPr marL="0" indent="0">
               <a:buNone/>
             </a:pPr>
             <a:r>
@@ -3055,9 +3108,9 @@
                 <a:solidFill>
                   <a:srgbClr val="1B1F3B"/>
                 </a:solidFill>
-                <a:latin typeface="Cambria" pitchFamily="34" charset="0"/>
-                <a:ea typeface="Cambria" pitchFamily="34" charset="-122"/>
-                <a:cs typeface="Cambria" pitchFamily="34" charset="-120"/>
+                <a:latin typeface="Cambria" panose="02040503050406030204" pitchFamily="34" charset="0"/>
+                <a:ea typeface="Cambria" panose="02040503050406030204" pitchFamily="34" charset="-122"/>
+                <a:cs typeface="Cambria" panose="02040503050406030204" pitchFamily="34" charset="-120"/>
               </a:rPr>
               <a:t>End-to-end data flow, entirely on Snowflake</a:t>
             </a:r>
@@ -3091,7 +3144,7 @@
             <a:prstDash val="solid"/>
           </a:ln>
           <a:effectLst>
-            <a:outerShdw sx="100000" sy="100000" kx="0" ky="0" algn="bl" rotWithShape="0" blurRad="76200" dist="25400" dir="5400000">
+            <a:outerShdw blurRad="76200" dist="25400" dir="5400000" algn="bl" rotWithShape="0">
               <a:srgbClr val="1E2761">
                 <a:alpha val="15000"/>
               </a:srgbClr>
@@ -3114,13 +3167,12 @@
             <a:avLst/>
           </a:prstGeom>
           <a:noFill/>
-          <a:ln/>
-        </p:spPr>
-        <p:txBody>
-          <a:bodyPr wrap="square" rtlCol="0" anchor="ctr"/>
-          <a:lstStyle/>
-          <a:p>
-            <a:pPr algn="ctr" indent="0" marL="0">
+        </p:spPr>
+        <p:txBody>
+          <a:bodyPr wrap="square" rtlCol="0" anchor="ctr"/>
+          <a:lstStyle/>
+          <a:p>
+            <a:pPr marL="0" indent="0" algn="ctr">
               <a:lnSpc>
                 <a:spcPct val="100000"/>
               </a:lnSpc>
@@ -3131,9 +3183,9 @@
                 <a:solidFill>
                   <a:srgbClr val="1E2761"/>
                 </a:solidFill>
-                <a:latin typeface="Calibri" pitchFamily="34" charset="0"/>
-                <a:ea typeface="Calibri" pitchFamily="34" charset="-122"/>
-                <a:cs typeface="Calibri" pitchFamily="34" charset="-120"/>
+                <a:latin typeface="Calibri" panose="020F0502020204030204" pitchFamily="34" charset="0"/>
+                <a:ea typeface="Calibri" panose="020F0502020204030204" pitchFamily="34" charset="-122"/>
+                <a:cs typeface="Calibri" panose="020F0502020204030204" pitchFamily="34" charset="-120"/>
               </a:rPr>
               <a:t>Raw Source Data</a:t>
             </a:r>
@@ -3156,13 +3208,12 @@
             <a:avLst/>
           </a:prstGeom>
           <a:noFill/>
-          <a:ln/>
         </p:spPr>
         <p:txBody>
           <a:bodyPr wrap="square" rtlCol="0" anchor="t"/>
           <a:lstStyle/>
           <a:p>
-            <a:pPr algn="ctr" indent="0" marL="0">
+            <a:pPr marL="0" indent="0" algn="ctr">
               <a:lnSpc>
                 <a:spcPct val="100000"/>
               </a:lnSpc>
@@ -3173,9 +3224,9 @@
                 <a:solidFill>
                   <a:srgbClr val="6B7280"/>
                 </a:solidFill>
-                <a:latin typeface="Calibri" pitchFamily="34" charset="0"/>
-                <a:ea typeface="Calibri" pitchFamily="34" charset="-122"/>
-                <a:cs typeface="Calibri" pitchFamily="34" charset="-120"/>
+                <a:latin typeface="Calibri" panose="020F0502020204030204" pitchFamily="34" charset="0"/>
+                <a:ea typeface="Calibri" panose="020F0502020204030204" pitchFamily="34" charset="-122"/>
+                <a:cs typeface="Calibri" panose="020F0502020204030204" pitchFamily="34" charset="-120"/>
               </a:rPr>
               <a:t>6 tables: telemetry, parts, suppliers, DTC codes, chemistry</a:t>
             </a:r>
@@ -3200,7 +3251,6 @@
           <a:solidFill>
             <a:srgbClr val="CADCFC"/>
           </a:solidFill>
-          <a:ln/>
         </p:spPr>
       </p:sp>
       <p:sp>
@@ -3229,7 +3279,7 @@
             <a:prstDash val="solid"/>
           </a:ln>
           <a:effectLst>
-            <a:outerShdw sx="100000" sy="100000" kx="0" ky="0" algn="bl" rotWithShape="0" blurRad="76200" dist="25400" dir="5400000">
+            <a:outerShdw blurRad="76200" dist="25400" dir="5400000" algn="bl" rotWithShape="0">
               <a:srgbClr val="1E2761">
                 <a:alpha val="15000"/>
               </a:srgbClr>
@@ -3252,13 +3302,12 @@
             <a:avLst/>
           </a:prstGeom>
           <a:noFill/>
-          <a:ln/>
-        </p:spPr>
-        <p:txBody>
-          <a:bodyPr wrap="square" rtlCol="0" anchor="ctr"/>
-          <a:lstStyle/>
-          <a:p>
-            <a:pPr algn="ctr" indent="0" marL="0">
+        </p:spPr>
+        <p:txBody>
+          <a:bodyPr wrap="square" rtlCol="0" anchor="ctr"/>
+          <a:lstStyle/>
+          <a:p>
+            <a:pPr marL="0" indent="0" algn="ctr">
               <a:lnSpc>
                 <a:spcPct val="100000"/>
               </a:lnSpc>
@@ -3269,9 +3318,9 @@
                 <a:solidFill>
                   <a:srgbClr val="1E2761"/>
                 </a:solidFill>
-                <a:latin typeface="Calibri" pitchFamily="34" charset="0"/>
-                <a:ea typeface="Calibri" pitchFamily="34" charset="-122"/>
-                <a:cs typeface="Calibri" pitchFamily="34" charset="-120"/>
+                <a:latin typeface="Calibri" panose="020F0502020204030204" pitchFamily="34" charset="0"/>
+                <a:ea typeface="Calibri" panose="020F0502020204030204" pitchFamily="34" charset="-122"/>
+                <a:cs typeface="Calibri" panose="020F0502020204030204" pitchFamily="34" charset="-120"/>
               </a:rPr>
               <a:t>Gold Layer View</a:t>
             </a:r>
@@ -3294,13 +3343,12 @@
             <a:avLst/>
           </a:prstGeom>
           <a:noFill/>
-          <a:ln/>
         </p:spPr>
         <p:txBody>
           <a:bodyPr wrap="square" rtlCol="0" anchor="t"/>
           <a:lstStyle/>
           <a:p>
-            <a:pPr algn="ctr" indent="0" marL="0">
+            <a:pPr marL="0" indent="0" algn="ctr">
               <a:lnSpc>
                 <a:spcPct val="100000"/>
               </a:lnSpc>
@@ -3311,9 +3359,9 @@
                 <a:solidFill>
                   <a:srgbClr val="6B7280"/>
                 </a:solidFill>
-                <a:latin typeface="Calibri" pitchFamily="34" charset="0"/>
-                <a:ea typeface="Calibri" pitchFamily="34" charset="-122"/>
-                <a:cs typeface="Calibri" pitchFamily="34" charset="-120"/>
+                <a:latin typeface="Calibri" panose="020F0502020204030204" pitchFamily="34" charset="0"/>
+                <a:ea typeface="Calibri" panose="020F0502020204030204" pitchFamily="34" charset="-122"/>
+                <a:cs typeface="Calibri" panose="020F0502020204030204" pitchFamily="34" charset="-120"/>
               </a:rPr>
               <a:t>Deduplicated &amp; joined; fan-out and date bugs fixed</a:t>
             </a:r>
@@ -3338,7 +3386,6 @@
           <a:solidFill>
             <a:srgbClr val="CADCFC"/>
           </a:solidFill>
-          <a:ln/>
         </p:spPr>
       </p:sp>
       <p:sp>
@@ -3367,7 +3414,7 @@
             <a:prstDash val="solid"/>
           </a:ln>
           <a:effectLst>
-            <a:outerShdw sx="100000" sy="100000" kx="0" ky="0" algn="bl" rotWithShape="0" blurRad="76200" dist="25400" dir="5400000">
+            <a:outerShdw blurRad="76200" dist="25400" dir="5400000" algn="bl" rotWithShape="0">
               <a:srgbClr val="1E2761">
                 <a:alpha val="15000"/>
               </a:srgbClr>
@@ -3390,13 +3437,12 @@
             <a:avLst/>
           </a:prstGeom>
           <a:noFill/>
-          <a:ln/>
-        </p:spPr>
-        <p:txBody>
-          <a:bodyPr wrap="square" rtlCol="0" anchor="ctr"/>
-          <a:lstStyle/>
-          <a:p>
-            <a:pPr algn="ctr" indent="0" marL="0">
+        </p:spPr>
+        <p:txBody>
+          <a:bodyPr wrap="square" rtlCol="0" anchor="ctr"/>
+          <a:lstStyle/>
+          <a:p>
+            <a:pPr marL="0" indent="0" algn="ctr">
               <a:lnSpc>
                 <a:spcPct val="100000"/>
               </a:lnSpc>
@@ -3407,9 +3453,9 @@
                 <a:solidFill>
                   <a:srgbClr val="1E2761"/>
                 </a:solidFill>
-                <a:latin typeface="Calibri" pitchFamily="34" charset="0"/>
-                <a:ea typeface="Calibri" pitchFamily="34" charset="-122"/>
-                <a:cs typeface="Calibri" pitchFamily="34" charset="-120"/>
+                <a:latin typeface="Calibri" panose="020F0502020204030204" pitchFamily="34" charset="0"/>
+                <a:ea typeface="Calibri" panose="020F0502020204030204" pitchFamily="34" charset="-122"/>
+                <a:cs typeface="Calibri" panose="020F0502020204030204" pitchFamily="34" charset="-120"/>
               </a:rPr>
               <a:t>Risk Projection Views</a:t>
             </a:r>
@@ -3432,13 +3478,12 @@
             <a:avLst/>
           </a:prstGeom>
           <a:noFill/>
-          <a:ln/>
         </p:spPr>
         <p:txBody>
           <a:bodyPr wrap="square" rtlCol="0" anchor="t"/>
           <a:lstStyle/>
           <a:p>
-            <a:pPr algn="ctr" indent="0" marL="0">
+            <a:pPr marL="0" indent="0" algn="ctr">
               <a:lnSpc>
                 <a:spcPct val="100000"/>
               </a:lnSpc>
@@ -3449,9 +3494,9 @@
                 <a:solidFill>
                   <a:srgbClr val="6B7280"/>
                 </a:solidFill>
-                <a:latin typeface="Calibri" pitchFamily="34" charset="0"/>
-                <a:ea typeface="Calibri" pitchFamily="34" charset="-122"/>
-                <a:cs typeface="Calibri" pitchFamily="34" charset="-120"/>
+                <a:latin typeface="Calibri" panose="020F0502020204030204" pitchFamily="34" charset="0"/>
+                <a:ea typeface="Calibri" panose="020F0502020204030204" pitchFamily="34" charset="-122"/>
+                <a:cs typeface="Calibri" panose="020F0502020204030204" pitchFamily="34" charset="-120"/>
               </a:rPr>
               <a:t>Fleet / supplier / part / chemistry, 30-day forecasts</a:t>
             </a:r>
@@ -3476,7 +3521,6 @@
           <a:solidFill>
             <a:srgbClr val="CADCFC"/>
           </a:solidFill>
-          <a:ln/>
         </p:spPr>
       </p:sp>
       <p:sp>
@@ -3505,7 +3549,7 @@
             <a:prstDash val="solid"/>
           </a:ln>
           <a:effectLst>
-            <a:outerShdw sx="100000" sy="100000" kx="0" ky="0" algn="bl" rotWithShape="0" blurRad="76200" dist="25400" dir="5400000">
+            <a:outerShdw blurRad="76200" dist="25400" dir="5400000" algn="bl" rotWithShape="0">
               <a:srgbClr val="1E2761">
                 <a:alpha val="15000"/>
               </a:srgbClr>
@@ -3528,13 +3572,12 @@
             <a:avLst/>
           </a:prstGeom>
           <a:noFill/>
-          <a:ln/>
-        </p:spPr>
-        <p:txBody>
-          <a:bodyPr wrap="square" rtlCol="0" anchor="ctr"/>
-          <a:lstStyle/>
-          <a:p>
-            <a:pPr algn="ctr" indent="0" marL="0">
+        </p:spPr>
+        <p:txBody>
+          <a:bodyPr wrap="square" rtlCol="0" anchor="ctr"/>
+          <a:lstStyle/>
+          <a:p>
+            <a:pPr marL="0" indent="0" algn="ctr">
               <a:lnSpc>
                 <a:spcPct val="100000"/>
               </a:lnSpc>
@@ -3545,9 +3588,9 @@
                 <a:solidFill>
                   <a:srgbClr val="1E2761"/>
                 </a:solidFill>
-                <a:latin typeface="Calibri" pitchFamily="34" charset="0"/>
-                <a:ea typeface="Calibri" pitchFamily="34" charset="-122"/>
-                <a:cs typeface="Calibri" pitchFamily="34" charset="-120"/>
+                <a:latin typeface="Calibri" panose="020F0502020204030204" pitchFamily="34" charset="0"/>
+                <a:ea typeface="Calibri" panose="020F0502020204030204" pitchFamily="34" charset="-122"/>
+                <a:cs typeface="Calibri" panose="020F0502020204030204" pitchFamily="34" charset="-120"/>
               </a:rPr>
               <a:t>Semantic View</a:t>
             </a:r>
@@ -3570,13 +3613,12 @@
             <a:avLst/>
           </a:prstGeom>
           <a:noFill/>
-          <a:ln/>
         </p:spPr>
         <p:txBody>
           <a:bodyPr wrap="square" rtlCol="0" anchor="t"/>
           <a:lstStyle/>
           <a:p>
-            <a:pPr algn="ctr" indent="0" marL="0">
+            <a:pPr marL="0" indent="0" algn="ctr">
               <a:lnSpc>
                 <a:spcPct val="100000"/>
               </a:lnSpc>
@@ -3587,9 +3629,9 @@
                 <a:solidFill>
                   <a:srgbClr val="6B7280"/>
                 </a:solidFill>
-                <a:latin typeface="Calibri" pitchFamily="34" charset="0"/>
-                <a:ea typeface="Calibri" pitchFamily="34" charset="-122"/>
-                <a:cs typeface="Calibri" pitchFamily="34" charset="-120"/>
+                <a:latin typeface="Calibri" panose="020F0502020204030204" pitchFamily="34" charset="0"/>
+                <a:ea typeface="Calibri" panose="020F0502020204030204" pitchFamily="34" charset="-122"/>
+                <a:cs typeface="Calibri" panose="020F0502020204030204" pitchFamily="34" charset="-120"/>
               </a:rPr>
               <a:t>Cortex Analyst: relationships, metrics, verified queries</a:t>
             </a:r>
@@ -3614,7 +3656,6 @@
           <a:solidFill>
             <a:srgbClr val="CADCFC"/>
           </a:solidFill>
-          <a:ln/>
         </p:spPr>
       </p:sp>
       <p:sp>
@@ -3643,7 +3684,7 @@
             <a:prstDash val="solid"/>
           </a:ln>
           <a:effectLst>
-            <a:outerShdw sx="100000" sy="100000" kx="0" ky="0" algn="bl" rotWithShape="0" blurRad="76200" dist="25400" dir="5400000">
+            <a:outerShdw blurRad="76200" dist="25400" dir="5400000" algn="bl" rotWithShape="0">
               <a:srgbClr val="1E2761">
                 <a:alpha val="15000"/>
               </a:srgbClr>
@@ -3666,13 +3707,12 @@
             <a:avLst/>
           </a:prstGeom>
           <a:noFill/>
-          <a:ln/>
-        </p:spPr>
-        <p:txBody>
-          <a:bodyPr wrap="square" rtlCol="0" anchor="ctr"/>
-          <a:lstStyle/>
-          <a:p>
-            <a:pPr algn="ctr" indent="0" marL="0">
+        </p:spPr>
+        <p:txBody>
+          <a:bodyPr wrap="square" rtlCol="0" anchor="ctr"/>
+          <a:lstStyle/>
+          <a:p>
+            <a:pPr marL="0" indent="0" algn="ctr">
               <a:lnSpc>
                 <a:spcPct val="100000"/>
               </a:lnSpc>
@@ -3683,9 +3723,9 @@
                 <a:solidFill>
                   <a:srgbClr val="1E2761"/>
                 </a:solidFill>
-                <a:latin typeface="Calibri" pitchFamily="34" charset="0"/>
-                <a:ea typeface="Calibri" pitchFamily="34" charset="-122"/>
-                <a:cs typeface="Calibri" pitchFamily="34" charset="-120"/>
+                <a:latin typeface="Calibri" panose="020F0502020204030204" pitchFamily="34" charset="0"/>
+                <a:ea typeface="Calibri" panose="020F0502020204030204" pitchFamily="34" charset="-122"/>
+                <a:cs typeface="Calibri" panose="020F0502020204030204" pitchFamily="34" charset="-120"/>
               </a:rPr>
               <a:t>Unified Cortex Agent</a:t>
             </a:r>
@@ -3708,13 +3748,12 @@
             <a:avLst/>
           </a:prstGeom>
           <a:noFill/>
-          <a:ln/>
         </p:spPr>
         <p:txBody>
           <a:bodyPr wrap="square" rtlCol="0" anchor="t"/>
           <a:lstStyle/>
           <a:p>
-            <a:pPr algn="ctr" indent="0" marL="0">
+            <a:pPr marL="0" indent="0" algn="ctr">
               <a:lnSpc>
                 <a:spcPct val="100000"/>
               </a:lnSpc>
@@ -3725,9 +3764,9 @@
                 <a:solidFill>
                   <a:srgbClr val="6B7280"/>
                 </a:solidFill>
-                <a:latin typeface="Calibri" pitchFamily="34" charset="0"/>
-                <a:ea typeface="Calibri" pitchFamily="34" charset="-122"/>
-                <a:cs typeface="Calibri" pitchFamily="34" charset="-120"/>
+                <a:latin typeface="Calibri" panose="020F0502020204030204" pitchFamily="34" charset="0"/>
+                <a:ea typeface="Calibri" panose="020F0502020204030204" pitchFamily="34" charset="-122"/>
+                <a:cs typeface="Calibri" panose="020F0502020204030204" pitchFamily="34" charset="-120"/>
               </a:rPr>
               <a:t>One agent, 3 integrated capabilities, NL Q&amp;A</a:t>
             </a:r>
@@ -3752,7 +3791,6 @@
           <a:solidFill>
             <a:srgbClr val="CADCFC"/>
           </a:solidFill>
-          <a:ln/>
         </p:spPr>
       </p:sp>
       <p:sp>
@@ -3781,7 +3819,7 @@
             <a:prstDash val="solid"/>
           </a:ln>
           <a:effectLst>
-            <a:outerShdw sx="100000" sy="100000" kx="0" ky="0" algn="bl" rotWithShape="0" blurRad="76200" dist="25400" dir="5400000">
+            <a:outerShdw blurRad="76200" dist="25400" dir="5400000" algn="bl" rotWithShape="0">
               <a:srgbClr val="1E2761">
                 <a:alpha val="15000"/>
               </a:srgbClr>
@@ -3804,13 +3842,12 @@
             <a:avLst/>
           </a:prstGeom>
           <a:noFill/>
-          <a:ln/>
-        </p:spPr>
-        <p:txBody>
-          <a:bodyPr wrap="square" rtlCol="0" anchor="ctr"/>
-          <a:lstStyle/>
-          <a:p>
-            <a:pPr algn="ctr" indent="0" marL="0">
+        </p:spPr>
+        <p:txBody>
+          <a:bodyPr wrap="square" rtlCol="0" anchor="ctr"/>
+          <a:lstStyle/>
+          <a:p>
+            <a:pPr marL="0" indent="0" algn="ctr">
               <a:lnSpc>
                 <a:spcPct val="100000"/>
               </a:lnSpc>
@@ -3821,9 +3858,9 @@
                 <a:solidFill>
                   <a:srgbClr val="1E2761"/>
                 </a:solidFill>
-                <a:latin typeface="Calibri" pitchFamily="34" charset="0"/>
-                <a:ea typeface="Calibri" pitchFamily="34" charset="-122"/>
-                <a:cs typeface="Calibri" pitchFamily="34" charset="-120"/>
+                <a:latin typeface="Calibri" panose="020F0502020204030204" pitchFamily="34" charset="0"/>
+                <a:ea typeface="Calibri" panose="020F0502020204030204" pitchFamily="34" charset="-122"/>
+                <a:cs typeface="Calibri" panose="020F0502020204030204" pitchFamily="34" charset="-120"/>
               </a:rPr>
               <a:t>Dashboard + MCP Server</a:t>
             </a:r>
@@ -3846,13 +3883,12 @@
             <a:avLst/>
           </a:prstGeom>
           <a:noFill/>
-          <a:ln/>
         </p:spPr>
         <p:txBody>
           <a:bodyPr wrap="square" rtlCol="0" anchor="t"/>
           <a:lstStyle/>
           <a:p>
-            <a:pPr algn="ctr" indent="0" marL="0">
+            <a:pPr marL="0" indent="0" algn="ctr">
               <a:lnSpc>
                 <a:spcPct val="100000"/>
               </a:lnSpc>
@@ -3863,9 +3899,9 @@
                 <a:solidFill>
                   <a:srgbClr val="6B7280"/>
                 </a:solidFill>
-                <a:latin typeface="Calibri" pitchFamily="34" charset="0"/>
-                <a:ea typeface="Calibri" pitchFamily="34" charset="-122"/>
-                <a:cs typeface="Calibri" pitchFamily="34" charset="-120"/>
+                <a:latin typeface="Calibri" panose="020F0502020204030204" pitchFamily="34" charset="0"/>
+                <a:ea typeface="Calibri" panose="020F0502020204030204" pitchFamily="34" charset="-122"/>
+                <a:cs typeface="Calibri" panose="020F0502020204030204" pitchFamily="34" charset="-120"/>
               </a:rPr>
               <a:t>Streamlit UI &amp; external AI tools via MCP protocol</a:t>
             </a:r>
@@ -3888,13 +3924,12 @@
             <a:avLst/>
           </a:prstGeom>
           <a:noFill/>
-          <a:ln/>
-        </p:spPr>
-        <p:txBody>
-          <a:bodyPr wrap="square" rtlCol="0" anchor="ctr"/>
-          <a:lstStyle/>
-          <a:p>
-            <a:pPr algn="ctr" indent="0" marL="0">
+        </p:spPr>
+        <p:txBody>
+          <a:bodyPr wrap="square" rtlCol="0" anchor="ctr"/>
+          <a:lstStyle/>
+          <a:p>
+            <a:pPr marL="0" indent="0" algn="ctr">
               <a:buNone/>
             </a:pPr>
             <a:r>
@@ -3902,9 +3937,9 @@
                 <a:solidFill>
                   <a:srgbClr val="6B7280"/>
                 </a:solidFill>
-                <a:latin typeface="Calibri" pitchFamily="34" charset="0"/>
-                <a:ea typeface="Calibri" pitchFamily="34" charset="-122"/>
-                <a:cs typeface="Calibri" pitchFamily="34" charset="-120"/>
+                <a:latin typeface="Calibri" panose="020F0502020204030204" pitchFamily="34" charset="0"/>
+                <a:ea typeface="Calibri" panose="020F0502020204030204" pitchFamily="34" charset="-122"/>
+                <a:cs typeface="Calibri" panose="020F0502020204030204" pitchFamily="34" charset="-120"/>
               </a:rPr>
               <a:t>Every stage runs natively on Snowflake — no data leaves the platform, and no external orchestration layer is required.</a:t>
             </a:r>
@@ -3950,23 +3985,22 @@
             <a:avLst/>
           </a:prstGeom>
           <a:noFill/>
-          <a:ln/>
-        </p:spPr>
-        <p:txBody>
-          <a:bodyPr wrap="square" rtlCol="0" anchor="ctr"/>
-          <a:lstStyle/>
-          <a:p>
-            <a:pPr indent="0" marL="0">
-              <a:buNone/>
-            </a:pPr>
-            <a:r>
-              <a:rPr lang="en-US" sz="1050" b="1" spc="150" kern="0" dirty="0">
+        </p:spPr>
+        <p:txBody>
+          <a:bodyPr wrap="square" rtlCol="0" anchor="ctr"/>
+          <a:lstStyle/>
+          <a:p>
+            <a:pPr marL="0" indent="0">
+              <a:buNone/>
+            </a:pPr>
+            <a:r>
+              <a:rPr lang="en-US" sz="1050" b="1" kern="0" spc="150" dirty="0">
                 <a:solidFill>
                   <a:srgbClr val="1E2761"/>
                 </a:solidFill>
-                <a:latin typeface="Calibri" pitchFamily="34" charset="0"/>
-                <a:ea typeface="Calibri" pitchFamily="34" charset="-122"/>
-                <a:cs typeface="Calibri" pitchFamily="34" charset="-120"/>
+                <a:latin typeface="Calibri" panose="020F0502020204030204" pitchFamily="34" charset="0"/>
+                <a:ea typeface="Calibri" panose="020F0502020204030204" pitchFamily="34" charset="-122"/>
+                <a:cs typeface="Calibri" panose="020F0502020204030204" pitchFamily="34" charset="-120"/>
               </a:rPr>
               <a:t>ENGINEERING FIXES ALONG THE WAY</a:t>
             </a:r>
@@ -3991,7 +4025,6 @@
           <a:solidFill>
             <a:srgbClr val="C0392B"/>
           </a:solidFill>
-          <a:ln/>
         </p:spPr>
       </p:sp>
       <p:sp>
@@ -4009,13 +4042,12 @@
             <a:avLst/>
           </a:prstGeom>
           <a:noFill/>
-          <a:ln/>
-        </p:spPr>
-        <p:txBody>
-          <a:bodyPr wrap="square" rtlCol="0" anchor="ctr"/>
-          <a:lstStyle/>
-          <a:p>
-            <a:pPr indent="0" marL="0">
+        </p:spPr>
+        <p:txBody>
+          <a:bodyPr wrap="square" rtlCol="0" anchor="ctr"/>
+          <a:lstStyle/>
+          <a:p>
+            <a:pPr marL="0" indent="0">
               <a:buNone/>
             </a:pPr>
             <a:r>
@@ -4023,9 +4055,9 @@
                 <a:solidFill>
                   <a:srgbClr val="1B1F3B"/>
                 </a:solidFill>
-                <a:latin typeface="Calibri" pitchFamily="34" charset="0"/>
-                <a:ea typeface="Calibri" pitchFamily="34" charset="-122"/>
-                <a:cs typeface="Calibri" pitchFamily="34" charset="-120"/>
+                <a:latin typeface="Calibri" panose="020F0502020204030204" pitchFamily="34" charset="0"/>
+                <a:ea typeface="Calibri" panose="020F0502020204030204" pitchFamily="34" charset="-122"/>
+                <a:cs typeface="Calibri" panose="020F0502020204030204" pitchFamily="34" charset="-120"/>
               </a:rPr>
               <a:t>Fan-out bug: deduped batch-variant PART_NUMBER rows (302,883 → 375,634 → fixed back to 302,883)</a:t>
             </a:r>
@@ -4050,7 +4082,6 @@
           <a:solidFill>
             <a:srgbClr val="C0392B"/>
           </a:solidFill>
-          <a:ln/>
         </p:spPr>
       </p:sp>
       <p:sp>
@@ -4068,13 +4099,12 @@
             <a:avLst/>
           </a:prstGeom>
           <a:noFill/>
-          <a:ln/>
-        </p:spPr>
-        <p:txBody>
-          <a:bodyPr wrap="square" rtlCol="0" anchor="ctr"/>
-          <a:lstStyle/>
-          <a:p>
-            <a:pPr indent="0" marL="0">
+        </p:spPr>
+        <p:txBody>
+          <a:bodyPr wrap="square" rtlCol="0" anchor="ctr"/>
+          <a:lstStyle/>
+          <a:p>
+            <a:pPr marL="0" indent="0">
               <a:buNone/>
             </a:pPr>
             <a:r>
@@ -4082,9 +4112,9 @@
                 <a:solidFill>
                   <a:srgbClr val="1B1F3B"/>
                 </a:solidFill>
-                <a:latin typeface="Calibri" pitchFamily="34" charset="0"/>
-                <a:ea typeface="Calibri" pitchFamily="34" charset="-122"/>
-                <a:cs typeface="Calibri" pitchFamily="34" charset="-120"/>
+                <a:latin typeface="Calibri" panose="020F0502020204030204" pitchFamily="34" charset="0"/>
+                <a:ea typeface="Calibri" panose="020F0502020204030204" pitchFamily="34" charset="-122"/>
+                <a:cs typeface="Calibri" panose="020F0502020204030204" pitchFamily="34" charset="-120"/>
               </a:rPr>
               <a:t>Date corruption: 2-digit year “0022” corrected to 2022 before any time-series work</a:t>
             </a:r>
@@ -4109,7 +4139,6 @@
           <a:solidFill>
             <a:srgbClr val="C0392B"/>
           </a:solidFill>
-          <a:ln/>
         </p:spPr>
       </p:sp>
       <p:sp>
@@ -4127,13 +4156,12 @@
             <a:avLst/>
           </a:prstGeom>
           <a:noFill/>
-          <a:ln/>
-        </p:spPr>
-        <p:txBody>
-          <a:bodyPr wrap="square" rtlCol="0" anchor="ctr"/>
-          <a:lstStyle/>
-          <a:p>
-            <a:pPr indent="0" marL="0">
+        </p:spPr>
+        <p:txBody>
+          <a:bodyPr wrap="square" rtlCol="0" anchor="ctr"/>
+          <a:lstStyle/>
+          <a:p>
+            <a:pPr marL="0" indent="0">
               <a:buNone/>
             </a:pPr>
             <a:r>
@@ -4141,9 +4169,9 @@
                 <a:solidFill>
                   <a:srgbClr val="1B1F3B"/>
                 </a:solidFill>
-                <a:latin typeface="Calibri" pitchFamily="34" charset="0"/>
-                <a:ea typeface="Calibri" pitchFamily="34" charset="-122"/>
-                <a:cs typeface="Calibri" pitchFamily="34" charset="-120"/>
+                <a:latin typeface="Calibri" panose="020F0502020204030204" pitchFamily="34" charset="0"/>
+                <a:ea typeface="Calibri" panose="020F0502020204030204" pitchFamily="34" charset="-122"/>
+                <a:cs typeface="Calibri" panose="020F0502020204030204" pitchFamily="34" charset="-120"/>
               </a:rPr>
               <a:t>Full date-spine built so zero-failure days are represented — unbiased failure-rate calculation</a:t>
             </a:r>
@@ -4166,13 +4194,12 @@
             <a:avLst/>
           </a:prstGeom>
           <a:noFill/>
-          <a:ln/>
-        </p:spPr>
-        <p:txBody>
-          <a:bodyPr wrap="square" rtlCol="0" anchor="ctr"/>
-          <a:lstStyle/>
-          <a:p>
-            <a:pPr indent="0" marL="0">
+        </p:spPr>
+        <p:txBody>
+          <a:bodyPr wrap="square" rtlCol="0" anchor="ctr"/>
+          <a:lstStyle/>
+          <a:p>
+            <a:pPr marL="0" indent="0">
               <a:buNone/>
             </a:pPr>
             <a:r>
@@ -4180,11 +4207,33 @@
                 <a:solidFill>
                   <a:srgbClr val="6B7280"/>
                 </a:solidFill>
-                <a:latin typeface="Calibri" pitchFamily="34" charset="0"/>
-                <a:ea typeface="Calibri" pitchFamily="34" charset="-122"/>
-                <a:cs typeface="Calibri" pitchFamily="34" charset="-120"/>
-              </a:rPr>
-              <a:t>Team VoltGuard  |  Vehicle Quality RCA Platform  |  Snowflake × Capgemini Hackathon 2026</a:t>
+                <a:latin typeface="Calibri" panose="020F0502020204030204" pitchFamily="34" charset="0"/>
+                <a:ea typeface="Calibri" panose="020F0502020204030204" pitchFamily="34" charset="-122"/>
+                <a:cs typeface="Calibri" panose="020F0502020204030204" pitchFamily="34" charset="-120"/>
+              </a:rPr>
+              <a:t>Team </a:t>
+            </a:r>
+            <a:r>
+              <a:rPr lang="en-IN" altLang="en-US" sz="850" dirty="0">
+                <a:solidFill>
+                  <a:srgbClr val="6B7280"/>
+                </a:solidFill>
+                <a:latin typeface="Calibri" panose="020F0502020204030204" pitchFamily="34" charset="0"/>
+                <a:ea typeface="Calibri" panose="020F0502020204030204" pitchFamily="34" charset="-122"/>
+                <a:cs typeface="Calibri" panose="020F0502020204030204" pitchFamily="34" charset="-120"/>
+              </a:rPr>
+              <a:t>The Snow Coders </a:t>
+            </a:r>
+            <a:r>
+              <a:rPr lang="en-US" sz="850" dirty="0">
+                <a:solidFill>
+                  <a:srgbClr val="6B7280"/>
+                </a:solidFill>
+                <a:latin typeface="Calibri" panose="020F0502020204030204" pitchFamily="34" charset="0"/>
+                <a:ea typeface="Calibri" panose="020F0502020204030204" pitchFamily="34" charset="-122"/>
+                <a:cs typeface="Calibri" panose="020F0502020204030204" pitchFamily="34" charset="-120"/>
+              </a:rPr>
+              <a:t>|  Vehicle Quality RCA Platform  |  Snowflake × Capgemini Hackathon 2026</a:t>
             </a:r>
             <a:endParaRPr lang="en-US" sz="850" dirty="0"/>
           </a:p>
@@ -4200,12 +4249,13 @@
 
 <file path=ppt/slides/slide4.xml><?xml version="1.0" encoding="utf-8"?>
 <p:sld xmlns:a="http://schemas.openxmlformats.org/drawingml/2006/main" xmlns:r="http://schemas.openxmlformats.org/officeDocument/2006/relationships" xmlns:p="http://schemas.openxmlformats.org/presentationml/2006/main">
-  <p:cSld name="Slide 4">
+  <p:cSld>
     <p:bg>
       <p:bgPr>
         <a:solidFill>
           <a:srgbClr val="FFFFFF"/>
         </a:solidFill>
+        <a:effectLst/>
       </p:bgPr>
     </p:bg>
     <p:spTree>
@@ -4237,23 +4287,22 @@
             <a:avLst/>
           </a:prstGeom>
           <a:noFill/>
-          <a:ln/>
-        </p:spPr>
-        <p:txBody>
-          <a:bodyPr wrap="square" rtlCol="0" anchor="ctr"/>
-          <a:lstStyle/>
-          <a:p>
-            <a:pPr indent="0" marL="0">
-              <a:buNone/>
-            </a:pPr>
-            <a:r>
-              <a:rPr lang="en-US" sz="1100" b="1" spc="200" kern="0" dirty="0">
+        </p:spPr>
+        <p:txBody>
+          <a:bodyPr wrap="square" rtlCol="0" anchor="ctr"/>
+          <a:lstStyle/>
+          <a:p>
+            <a:pPr marL="0" indent="0">
+              <a:buNone/>
+            </a:pPr>
+            <a:r>
+              <a:rPr lang="en-US" sz="1100" b="1" kern="0" spc="200" dirty="0">
                 <a:solidFill>
                   <a:srgbClr val="1E2761"/>
                 </a:solidFill>
-                <a:latin typeface="Calibri" pitchFamily="34" charset="0"/>
-                <a:ea typeface="Calibri" pitchFamily="34" charset="-122"/>
-                <a:cs typeface="Calibri" pitchFamily="34" charset="-120"/>
+                <a:latin typeface="Calibri" panose="020F0502020204030204" pitchFamily="34" charset="0"/>
+                <a:ea typeface="Calibri" panose="020F0502020204030204" pitchFamily="34" charset="-122"/>
+                <a:cs typeface="Calibri" panose="020F0502020204030204" pitchFamily="34" charset="-120"/>
               </a:rPr>
               <a:t>KEY FINDINGS</a:t>
             </a:r>
@@ -4276,13 +4325,12 @@
             <a:avLst/>
           </a:prstGeom>
           <a:noFill/>
-          <a:ln/>
-        </p:spPr>
-        <p:txBody>
-          <a:bodyPr wrap="square" rtlCol="0" anchor="ctr"/>
-          <a:lstStyle/>
-          <a:p>
-            <a:pPr indent="0" marL="0">
+        </p:spPr>
+        <p:txBody>
+          <a:bodyPr wrap="square" rtlCol="0" anchor="ctr"/>
+          <a:lstStyle/>
+          <a:p>
+            <a:pPr marL="0" indent="0">
               <a:buNone/>
             </a:pPr>
             <a:r>
@@ -4290,9 +4338,9 @@
                 <a:solidFill>
                   <a:srgbClr val="1B1F3B"/>
                 </a:solidFill>
-                <a:latin typeface="Cambria" pitchFamily="34" charset="0"/>
-                <a:ea typeface="Cambria" pitchFamily="34" charset="-122"/>
-                <a:cs typeface="Cambria" pitchFamily="34" charset="-120"/>
+                <a:latin typeface="Cambria" panose="02040503050406030204" pitchFamily="34" charset="0"/>
+                <a:ea typeface="Cambria" panose="02040503050406030204" pitchFamily="34" charset="-122"/>
+                <a:cs typeface="Cambria" panose="02040503050406030204" pitchFamily="34" charset="-120"/>
               </a:rPr>
               <a:t>Failures are concentrated, and the forecast is explainable</a:t>
             </a:r>
@@ -4302,7 +4350,7 @@
       </p:sp>
       <p:graphicFrame>
         <p:nvGraphicFramePr>
-          <p:cNvPr id="4" name="Chart 0" descr=""/>
+          <p:cNvPr id="4" name="Chart 0"/>
           <p:cNvGraphicFramePr/>
           <p:nvPr/>
         </p:nvGraphicFramePr>
@@ -4310,9 +4358,9 @@
           <a:off x="502920" y="1417320"/>
           <a:ext cx="5943600" cy="2880360"/>
         </p:xfrm>
-        <a:graphic xmlns:a="http://schemas.openxmlformats.org/drawingml/2006/main">
+        <a:graphic>
           <a:graphicData uri="http://schemas.openxmlformats.org/drawingml/2006/chart">
-            <c:chart xmlns:c="http://schemas.openxmlformats.org/drawingml/2006/chart" r:id="rId1"/>
+            <c:chart xmlns:c="http://schemas.openxmlformats.org/drawingml/2006/chart" xmlns:r="http://schemas.openxmlformats.org/officeDocument/2006/relationships" r:id="rId1"/>
           </a:graphicData>
         </a:graphic>
       </p:graphicFrame>
@@ -4358,13 +4406,12 @@
             <a:avLst/>
           </a:prstGeom>
           <a:noFill/>
-          <a:ln/>
-        </p:spPr>
-        <p:txBody>
-          <a:bodyPr wrap="square" rtlCol="0" anchor="ctr"/>
-          <a:lstStyle/>
-          <a:p>
-            <a:pPr indent="0" marL="0">
+        </p:spPr>
+        <p:txBody>
+          <a:bodyPr wrap="square" rtlCol="0" anchor="ctr"/>
+          <a:lstStyle/>
+          <a:p>
+            <a:pPr marL="0" indent="0">
               <a:buNone/>
             </a:pPr>
             <a:r>
@@ -4372,9 +4419,9 @@
                 <a:solidFill>
                   <a:srgbClr val="C0392B"/>
                 </a:solidFill>
-                <a:latin typeface="Cambria" pitchFamily="34" charset="0"/>
-                <a:ea typeface="Cambria" pitchFamily="34" charset="-122"/>
-                <a:cs typeface="Cambria" pitchFamily="34" charset="-120"/>
+                <a:latin typeface="Cambria" panose="02040503050406030204" pitchFamily="34" charset="0"/>
+                <a:ea typeface="Cambria" panose="02040503050406030204" pitchFamily="34" charset="-122"/>
+                <a:cs typeface="Cambria" panose="02040503050406030204" pitchFamily="34" charset="-120"/>
               </a:rPr>
               <a:t>2 of 5 suppliers = 100% of risk</a:t>
             </a:r>
@@ -4397,13 +4444,12 @@
             <a:avLst/>
           </a:prstGeom>
           <a:noFill/>
-          <a:ln/>
         </p:spPr>
         <p:txBody>
           <a:bodyPr wrap="square" rtlCol="0" anchor="t"/>
           <a:lstStyle/>
           <a:p>
-            <a:pPr indent="0" marL="0">
+            <a:pPr marL="0" indent="0">
               <a:lnSpc>
                 <a:spcPct val="125000"/>
               </a:lnSpc>
@@ -4414,77 +4460,53 @@
                 <a:solidFill>
                   <a:srgbClr val="1B1F3B"/>
                 </a:solidFill>
-                <a:latin typeface="Calibri" pitchFamily="34" charset="0"/>
-                <a:ea typeface="Calibri" pitchFamily="34" charset="-122"/>
-                <a:cs typeface="Calibri" pitchFamily="34" charset="-120"/>
+                <a:latin typeface="Calibri" panose="020F0502020204030204" pitchFamily="34" charset="0"/>
+                <a:ea typeface="Calibri" panose="020F0502020204030204" pitchFamily="34" charset="-122"/>
+                <a:cs typeface="Calibri" panose="020F0502020204030204" pitchFamily="34" charset="-120"/>
               </a:rPr>
               <a:t>Traced to </a:t>
             </a:r>
-            <a:pPr indent="0" marL="0">
-              <a:lnSpc>
-                <a:spcPct val="125000"/>
-              </a:lnSpc>
-              <a:buNone/>
-            </a:pPr>
             <a:r>
               <a:rPr lang="en-US" sz="1150" b="1" dirty="0">
                 <a:solidFill>
                   <a:srgbClr val="1E2761"/>
                 </a:solidFill>
-                <a:latin typeface="Calibri" pitchFamily="34" charset="0"/>
-                <a:ea typeface="Calibri" pitchFamily="34" charset="-122"/>
-                <a:cs typeface="Calibri" pitchFamily="34" charset="-120"/>
+                <a:latin typeface="Calibri" panose="020F0502020204030204" pitchFamily="34" charset="0"/>
+                <a:ea typeface="Calibri" panose="020F0502020204030204" pitchFamily="34" charset="-122"/>
+                <a:cs typeface="Calibri" panose="020F0502020204030204" pitchFamily="34" charset="-120"/>
               </a:rPr>
               <a:t>2 parts</a:t>
             </a:r>
-            <a:pPr indent="0" marL="0">
-              <a:lnSpc>
-                <a:spcPct val="125000"/>
-              </a:lnSpc>
-              <a:buNone/>
-            </a:pPr>
             <a:r>
               <a:rPr lang="en-US" sz="1150" dirty="0">
                 <a:solidFill>
                   <a:srgbClr val="1B1F3B"/>
                 </a:solidFill>
-                <a:latin typeface="Calibri" pitchFamily="34" charset="0"/>
-                <a:ea typeface="Calibri" pitchFamily="34" charset="-122"/>
-                <a:cs typeface="Calibri" pitchFamily="34" charset="-120"/>
+                <a:latin typeface="Calibri" panose="020F0502020204030204" pitchFamily="34" charset="0"/>
+                <a:ea typeface="Calibri" panose="020F0502020204030204" pitchFamily="34" charset="-122"/>
+                <a:cs typeface="Calibri" panose="020F0502020204030204" pitchFamily="34" charset="-120"/>
               </a:rPr>
               <a:t> and </a:t>
             </a:r>
-            <a:pPr indent="0" marL="0">
-              <a:lnSpc>
-                <a:spcPct val="125000"/>
-              </a:lnSpc>
-              <a:buNone/>
-            </a:pPr>
             <a:r>
               <a:rPr lang="en-US" sz="1150" b="1" dirty="0">
                 <a:solidFill>
                   <a:srgbClr val="1E2761"/>
                 </a:solidFill>
-                <a:latin typeface="Calibri" pitchFamily="34" charset="0"/>
-                <a:ea typeface="Calibri" pitchFamily="34" charset="-122"/>
-                <a:cs typeface="Calibri" pitchFamily="34" charset="-120"/>
+                <a:latin typeface="Calibri" panose="020F0502020204030204" pitchFamily="34" charset="0"/>
+                <a:ea typeface="Calibri" panose="020F0502020204030204" pitchFamily="34" charset="-122"/>
+                <a:cs typeface="Calibri" panose="020F0502020204030204" pitchFamily="34" charset="-120"/>
               </a:rPr>
               <a:t>2 chemistries</a:t>
             </a:r>
-            <a:pPr indent="0" marL="0">
-              <a:lnSpc>
-                <a:spcPct val="125000"/>
-              </a:lnSpc>
-              <a:buNone/>
-            </a:pPr>
             <a:r>
               <a:rPr lang="en-US" sz="1150" dirty="0">
                 <a:solidFill>
                   <a:srgbClr val="1B1F3B"/>
                 </a:solidFill>
-                <a:latin typeface="Calibri" pitchFamily="34" charset="0"/>
-                <a:ea typeface="Calibri" pitchFamily="34" charset="-122"/>
-                <a:cs typeface="Calibri" pitchFamily="34" charset="-120"/>
+                <a:latin typeface="Calibri" panose="020F0502020204030204" pitchFamily="34" charset="0"/>
+                <a:ea typeface="Calibri" panose="020F0502020204030204" pitchFamily="34" charset="-122"/>
+                <a:cs typeface="Calibri" panose="020F0502020204030204" pitchFamily="34" charset="-120"/>
               </a:rPr>
               <a:t> (Cobalt Dioxide, Lithium-Ion) — all failure codes are voltage-related, pointing to a fixable chemistry/voltage-stability issue at specific suppliers, not a fleet-wide design defect.</a:t>
             </a:r>
@@ -4530,23 +4552,22 @@
             <a:avLst/>
           </a:prstGeom>
           <a:noFill/>
-          <a:ln/>
-        </p:spPr>
-        <p:txBody>
-          <a:bodyPr wrap="square" rtlCol="0" anchor="ctr"/>
-          <a:lstStyle/>
-          <a:p>
-            <a:pPr indent="0" marL="0">
-              <a:buNone/>
-            </a:pPr>
-            <a:r>
-              <a:rPr lang="en-US" sz="1050" b="1" spc="150" kern="0" dirty="0">
+        </p:spPr>
+        <p:txBody>
+          <a:bodyPr wrap="square" rtlCol="0" anchor="ctr"/>
+          <a:lstStyle/>
+          <a:p>
+            <a:pPr marL="0" indent="0">
+              <a:buNone/>
+            </a:pPr>
+            <a:r>
+              <a:rPr lang="en-US" sz="1050" b="1" kern="0" spc="150" dirty="0">
                 <a:solidFill>
                   <a:srgbClr val="1E2761"/>
                 </a:solidFill>
-                <a:latin typeface="Calibri" pitchFamily="34" charset="0"/>
-                <a:ea typeface="Calibri" pitchFamily="34" charset="-122"/>
-                <a:cs typeface="Calibri" pitchFamily="34" charset="-120"/>
+                <a:latin typeface="Calibri" panose="020F0502020204030204" pitchFamily="34" charset="0"/>
+                <a:ea typeface="Calibri" panose="020F0502020204030204" pitchFamily="34" charset="-122"/>
+                <a:cs typeface="Calibri" panose="020F0502020204030204" pitchFamily="34" charset="-120"/>
               </a:rPr>
               <a:t>FORECASTING METHOD</a:t>
             </a:r>
@@ -4569,13 +4590,12 @@
             <a:avLst/>
           </a:prstGeom>
           <a:noFill/>
-          <a:ln/>
         </p:spPr>
         <p:txBody>
           <a:bodyPr wrap="square" rtlCol="0" anchor="t"/>
           <a:lstStyle/>
           <a:p>
-            <a:pPr indent="0" marL="0">
+            <a:pPr marL="0" indent="0">
               <a:lnSpc>
                 <a:spcPct val="125000"/>
               </a:lnSpc>
@@ -4586,60 +4606,42 @@
                 <a:solidFill>
                   <a:srgbClr val="1B1F3B"/>
                 </a:solidFill>
-                <a:latin typeface="Calibri" pitchFamily="34" charset="0"/>
-                <a:ea typeface="Calibri" pitchFamily="34" charset="-122"/>
-                <a:cs typeface="Calibri" pitchFamily="34" charset="-120"/>
+                <a:latin typeface="Calibri" panose="020F0502020204030204" pitchFamily="34" charset="0"/>
+                <a:ea typeface="Calibri" panose="020F0502020204030204" pitchFamily="34" charset="-122"/>
+                <a:cs typeface="Calibri" panose="020F0502020204030204" pitchFamily="34" charset="-120"/>
               </a:rPr>
               <a:t>SNOWFLAKE.ML.FORECAST</a:t>
             </a:r>
-            <a:pPr indent="0" marL="0">
-              <a:lnSpc>
-                <a:spcPct val="125000"/>
-              </a:lnSpc>
-              <a:buNone/>
-            </a:pPr>
             <a:r>
               <a:rPr lang="en-US" sz="1100" dirty="0">
                 <a:solidFill>
                   <a:srgbClr val="1B1F3B"/>
                 </a:solidFill>
-                <a:latin typeface="Calibri" pitchFamily="34" charset="0"/>
-                <a:ea typeface="Calibri" pitchFamily="34" charset="-122"/>
-                <a:cs typeface="Calibri" pitchFamily="34" charset="-120"/>
+                <a:latin typeface="Calibri" panose="020F0502020204030204" pitchFamily="34" charset="0"/>
+                <a:ea typeface="Calibri" panose="020F0502020204030204" pitchFamily="34" charset="-122"/>
+                <a:cs typeface="Calibri" panose="020F0502020204030204" pitchFamily="34" charset="-120"/>
               </a:rPr>
               <a:t> underperformed on our sparse 59-day dataset (SMAPE ≈ 2.0, worst possible). We shipped a </a:t>
             </a:r>
-            <a:pPr indent="0" marL="0">
-              <a:lnSpc>
-                <a:spcPct val="125000"/>
-              </a:lnSpc>
-              <a:buNone/>
-            </a:pPr>
             <a:r>
               <a:rPr lang="en-US" sz="1100" b="1" dirty="0">
                 <a:solidFill>
                   <a:srgbClr val="1E2761"/>
                 </a:solidFill>
-                <a:latin typeface="Calibri" pitchFamily="34" charset="0"/>
-                <a:ea typeface="Calibri" pitchFamily="34" charset="-122"/>
-                <a:cs typeface="Calibri" pitchFamily="34" charset="-120"/>
+                <a:latin typeface="Calibri" panose="020F0502020204030204" pitchFamily="34" charset="0"/>
+                <a:ea typeface="Calibri" panose="020F0502020204030204" pitchFamily="34" charset="-122"/>
+                <a:cs typeface="Calibri" panose="020F0502020204030204" pitchFamily="34" charset="-120"/>
               </a:rPr>
               <a:t>Poisson rate-based projection</a:t>
             </a:r>
-            <a:pPr indent="0" marL="0">
-              <a:lnSpc>
-                <a:spcPct val="125000"/>
-              </a:lnSpc>
-              <a:buNone/>
-            </a:pPr>
             <a:r>
               <a:rPr lang="en-US" sz="1100" dirty="0">
                 <a:solidFill>
                   <a:srgbClr val="1B1F3B"/>
                 </a:solidFill>
-                <a:latin typeface="Calibri" pitchFamily="34" charset="0"/>
-                <a:ea typeface="Calibri" pitchFamily="34" charset="-122"/>
-                <a:cs typeface="Calibri" pitchFamily="34" charset="-120"/>
+                <a:latin typeface="Calibri" panose="020F0502020204030204" pitchFamily="34" charset="0"/>
+                <a:ea typeface="Calibri" panose="020F0502020204030204" pitchFamily="34" charset="-122"/>
+                <a:cs typeface="Calibri" panose="020F0502020204030204" pitchFamily="34" charset="-120"/>
               </a:rPr>
               <a:t> instead — statistically valid for sparse counts, fully explainable, and always non-negative.</a:t>
             </a:r>
@@ -4666,7 +4668,6 @@
           <a:solidFill>
             <a:srgbClr val="1E2761"/>
           </a:solidFill>
-          <a:ln/>
         </p:spPr>
       </p:sp>
       <p:sp>
@@ -4684,13 +4685,12 @@
             <a:avLst/>
           </a:prstGeom>
           <a:noFill/>
-          <a:ln/>
-        </p:spPr>
-        <p:txBody>
-          <a:bodyPr wrap="square" rtlCol="0" anchor="ctr"/>
-          <a:lstStyle/>
-          <a:p>
-            <a:pPr algn="ctr" indent="0" marL="0">
+        </p:spPr>
+        <p:txBody>
+          <a:bodyPr wrap="square" rtlCol="0" anchor="ctr"/>
+          <a:lstStyle/>
+          <a:p>
+            <a:pPr marL="0" indent="0" algn="ctr">
               <a:buNone/>
             </a:pPr>
             <a:r>
@@ -4698,9 +4698,9 @@
                 <a:solidFill>
                   <a:srgbClr val="FFFFFF"/>
                 </a:solidFill>
-                <a:latin typeface="Cambria" pitchFamily="34" charset="0"/>
-                <a:ea typeface="Cambria" pitchFamily="34" charset="-122"/>
-                <a:cs typeface="Cambria" pitchFamily="34" charset="-120"/>
+                <a:latin typeface="Cambria" panose="02040503050406030204" pitchFamily="34" charset="0"/>
+                <a:ea typeface="Cambria" panose="02040503050406030204" pitchFamily="34" charset="-122"/>
+                <a:cs typeface="Cambria" panose="02040503050406030204" pitchFamily="34" charset="-120"/>
               </a:rPr>
               <a:t>2,649</a:t>
             </a:r>
@@ -4723,13 +4723,12 @@
             <a:avLst/>
           </a:prstGeom>
           <a:noFill/>
-          <a:ln/>
-        </p:spPr>
-        <p:txBody>
-          <a:bodyPr wrap="square" rtlCol="0" anchor="ctr"/>
-          <a:lstStyle/>
-          <a:p>
-            <a:pPr algn="ctr" indent="0" marL="0">
+        </p:spPr>
+        <p:txBody>
+          <a:bodyPr wrap="square" rtlCol="0" anchor="ctr"/>
+          <a:lstStyle/>
+          <a:p>
+            <a:pPr marL="0" indent="0" algn="ctr">
               <a:lnSpc>
                 <a:spcPct val="110000"/>
               </a:lnSpc>
@@ -4740,9 +4739,9 @@
                 <a:solidFill>
                   <a:srgbClr val="6B7280"/>
                 </a:solidFill>
-                <a:latin typeface="Calibri" pitchFamily="34" charset="0"/>
-                <a:ea typeface="Calibri" pitchFamily="34" charset="-122"/>
-                <a:cs typeface="Calibri" pitchFamily="34" charset="-120"/>
+                <a:latin typeface="Calibri" panose="020F0502020204030204" pitchFamily="34" charset="0"/>
+                <a:ea typeface="Calibri" panose="020F0502020204030204" pitchFamily="34" charset="-122"/>
+                <a:cs typeface="Calibri" panose="020F0502020204030204" pitchFamily="34" charset="-120"/>
               </a:rPr>
               <a:t>next-30-day fleet forecast (95% CI: 2,548–2,750)</a:t>
             </a:r>
@@ -4765,13 +4764,12 @@
             <a:avLst/>
           </a:prstGeom>
           <a:noFill/>
-          <a:ln/>
-        </p:spPr>
-        <p:txBody>
-          <a:bodyPr wrap="square" rtlCol="0" anchor="ctr"/>
-          <a:lstStyle/>
-          <a:p>
-            <a:pPr indent="0" marL="0">
+        </p:spPr>
+        <p:txBody>
+          <a:bodyPr wrap="square" rtlCol="0" anchor="ctr"/>
+          <a:lstStyle/>
+          <a:p>
+            <a:pPr marL="0" indent="0">
               <a:buNone/>
             </a:pPr>
             <a:r>
@@ -4779,11 +4777,33 @@
                 <a:solidFill>
                   <a:srgbClr val="6B7280"/>
                 </a:solidFill>
-                <a:latin typeface="Calibri" pitchFamily="34" charset="0"/>
-                <a:ea typeface="Calibri" pitchFamily="34" charset="-122"/>
-                <a:cs typeface="Calibri" pitchFamily="34" charset="-120"/>
-              </a:rPr>
-              <a:t>Team VoltGuard  |  Vehicle Quality RCA Platform  |  Snowflake × Capgemini Hackathon 2026</a:t>
+                <a:latin typeface="Calibri" panose="020F0502020204030204" pitchFamily="34" charset="0"/>
+                <a:ea typeface="Calibri" panose="020F0502020204030204" pitchFamily="34" charset="-122"/>
+                <a:cs typeface="Calibri" panose="020F0502020204030204" pitchFamily="34" charset="-120"/>
+              </a:rPr>
+              <a:t>Team </a:t>
+            </a:r>
+            <a:r>
+              <a:rPr lang="en-IN" altLang="en-US" sz="850" dirty="0">
+                <a:solidFill>
+                  <a:srgbClr val="6B7280"/>
+                </a:solidFill>
+                <a:latin typeface="Calibri" panose="020F0502020204030204" pitchFamily="34" charset="0"/>
+                <a:ea typeface="Calibri" panose="020F0502020204030204" pitchFamily="34" charset="-122"/>
+                <a:cs typeface="Calibri" panose="020F0502020204030204" pitchFamily="34" charset="-120"/>
+              </a:rPr>
+              <a:t>The Snow Coders </a:t>
+            </a:r>
+            <a:r>
+              <a:rPr lang="en-US" sz="850" dirty="0">
+                <a:solidFill>
+                  <a:srgbClr val="6B7280"/>
+                </a:solidFill>
+                <a:latin typeface="Calibri" panose="020F0502020204030204" pitchFamily="34" charset="0"/>
+                <a:ea typeface="Calibri" panose="020F0502020204030204" pitchFamily="34" charset="-122"/>
+                <a:cs typeface="Calibri" panose="020F0502020204030204" pitchFamily="34" charset="-120"/>
+              </a:rPr>
+              <a:t>|  Vehicle Quality RCA Platform  |  Snowflake × Capgemini Hackathon 2026</a:t>
             </a:r>
             <a:endParaRPr lang="en-US" sz="850" dirty="0"/>
           </a:p>
@@ -4799,12 +4819,13 @@
 
 <file path=ppt/slides/slide5.xml><?xml version="1.0" encoding="utf-8"?>
 <p:sld xmlns:a="http://schemas.openxmlformats.org/drawingml/2006/main" xmlns:r="http://schemas.openxmlformats.org/officeDocument/2006/relationships" xmlns:p="http://schemas.openxmlformats.org/presentationml/2006/main">
-  <p:cSld name="Slide 5">
+  <p:cSld>
     <p:bg>
       <p:bgPr>
         <a:solidFill>
           <a:srgbClr val="1E2761"/>
         </a:solidFill>
+        <a:effectLst/>
       </p:bgPr>
     </p:bg>
     <p:spTree>
@@ -4836,23 +4857,22 @@
             <a:avLst/>
           </a:prstGeom>
           <a:noFill/>
-          <a:ln/>
-        </p:spPr>
-        <p:txBody>
-          <a:bodyPr wrap="square" rtlCol="0" anchor="ctr"/>
-          <a:lstStyle/>
-          <a:p>
-            <a:pPr indent="0" marL="0">
-              <a:buNone/>
-            </a:pPr>
-            <a:r>
-              <a:rPr lang="en-US" sz="1100" b="1" spc="200" kern="0" dirty="0">
+        </p:spPr>
+        <p:txBody>
+          <a:bodyPr wrap="square" rtlCol="0" anchor="ctr"/>
+          <a:lstStyle/>
+          <a:p>
+            <a:pPr marL="0" indent="0">
+              <a:buNone/>
+            </a:pPr>
+            <a:r>
+              <a:rPr lang="en-US" sz="1100" b="1" kern="0" spc="200" dirty="0">
                 <a:solidFill>
                   <a:srgbClr val="CADCFC"/>
                 </a:solidFill>
-                <a:latin typeface="Calibri" pitchFamily="34" charset="0"/>
-                <a:ea typeface="Calibri" pitchFamily="34" charset="-122"/>
-                <a:cs typeface="Calibri" pitchFamily="34" charset="-120"/>
+                <a:latin typeface="Calibri" panose="020F0502020204030204" pitchFamily="34" charset="0"/>
+                <a:ea typeface="Calibri" panose="020F0502020204030204" pitchFamily="34" charset="-122"/>
+                <a:cs typeface="Calibri" panose="020F0502020204030204" pitchFamily="34" charset="-120"/>
               </a:rPr>
               <a:t>BUSINESS VALUE &amp; INNOVATION</a:t>
             </a:r>
@@ -4875,13 +4895,12 @@
             <a:avLst/>
           </a:prstGeom>
           <a:noFill/>
-          <a:ln/>
-        </p:spPr>
-        <p:txBody>
-          <a:bodyPr wrap="square" rtlCol="0" anchor="ctr"/>
-          <a:lstStyle/>
-          <a:p>
-            <a:pPr indent="0" marL="0">
+        </p:spPr>
+        <p:txBody>
+          <a:bodyPr wrap="square" rtlCol="0" anchor="ctr"/>
+          <a:lstStyle/>
+          <a:p>
+            <a:pPr marL="0" indent="0">
               <a:buNone/>
             </a:pPr>
             <a:r>
@@ -4889,9 +4908,9 @@
                 <a:solidFill>
                   <a:srgbClr val="FFFFFF"/>
                 </a:solidFill>
-                <a:latin typeface="Cambria" pitchFamily="34" charset="0"/>
-                <a:ea typeface="Cambria" pitchFamily="34" charset="-122"/>
-                <a:cs typeface="Cambria" pitchFamily="34" charset="-120"/>
+                <a:latin typeface="Cambria" panose="02040503050406030204" pitchFamily="34" charset="0"/>
+                <a:ea typeface="Cambria" panose="02040503050406030204" pitchFamily="34" charset="-122"/>
+                <a:cs typeface="Cambria" panose="02040503050406030204" pitchFamily="34" charset="-120"/>
               </a:rPr>
               <a:t>Why this matters, and what makes it different</a:t>
             </a:r>
@@ -4914,13 +4933,12 @@
             <a:avLst/>
           </a:prstGeom>
           <a:noFill/>
-          <a:ln/>
-        </p:spPr>
-        <p:txBody>
-          <a:bodyPr wrap="square" rtlCol="0" anchor="ctr"/>
-          <a:lstStyle/>
-          <a:p>
-            <a:pPr algn="ctr" indent="0" marL="0">
+        </p:spPr>
+        <p:txBody>
+          <a:bodyPr wrap="square" rtlCol="0" anchor="ctr"/>
+          <a:lstStyle/>
+          <a:p>
+            <a:pPr marL="0" indent="0" algn="ctr">
               <a:buNone/>
             </a:pPr>
             <a:r>
@@ -4928,9 +4946,9 @@
                 <a:solidFill>
                   <a:srgbClr val="CADCFC"/>
                 </a:solidFill>
-                <a:latin typeface="Cambria" pitchFamily="34" charset="0"/>
-                <a:ea typeface="Cambria" pitchFamily="34" charset="-122"/>
-                <a:cs typeface="Cambria" pitchFamily="34" charset="-120"/>
+                <a:latin typeface="Cambria" panose="02040503050406030204" pitchFamily="34" charset="0"/>
+                <a:ea typeface="Cambria" panose="02040503050406030204" pitchFamily="34" charset="-122"/>
+                <a:cs typeface="Cambria" panose="02040503050406030204" pitchFamily="34" charset="-120"/>
               </a:rPr>
               <a:t>2,649</a:t>
             </a:r>
@@ -4953,13 +4971,12 @@
             <a:avLst/>
           </a:prstGeom>
           <a:noFill/>
-          <a:ln/>
-        </p:spPr>
-        <p:txBody>
-          <a:bodyPr wrap="square" rtlCol="0" anchor="ctr"/>
-          <a:lstStyle/>
-          <a:p>
-            <a:pPr algn="ctr" indent="0" marL="0">
+        </p:spPr>
+        <p:txBody>
+          <a:bodyPr wrap="square" rtlCol="0" anchor="ctr"/>
+          <a:lstStyle/>
+          <a:p>
+            <a:pPr marL="0" indent="0" algn="ctr">
               <a:lnSpc>
                 <a:spcPct val="110000"/>
               </a:lnSpc>
@@ -4970,16 +4987,16 @@
                 <a:solidFill>
                   <a:srgbClr val="6B7280"/>
                 </a:solidFill>
-                <a:latin typeface="Calibri" pitchFamily="34" charset="0"/>
-                <a:ea typeface="Calibri" pitchFamily="34" charset="-122"/>
-                <a:cs typeface="Calibri" pitchFamily="34" charset="-120"/>
+                <a:latin typeface="Calibri" panose="020F0502020204030204" pitchFamily="34" charset="0"/>
+                <a:ea typeface="Calibri" panose="020F0502020204030204" pitchFamily="34" charset="-122"/>
+                <a:cs typeface="Calibri" panose="020F0502020204030204" pitchFamily="34" charset="-120"/>
               </a:rPr>
               <a:t>failures projected fleet-wide</a:t>
             </a:r>
             <a:endParaRPr lang="en-US" sz="1000" dirty="0"/>
           </a:p>
           <a:p>
-            <a:pPr algn="ctr" indent="0" marL="0">
+            <a:pPr marL="0" indent="0" algn="ctr">
               <a:lnSpc>
                 <a:spcPct val="110000"/>
               </a:lnSpc>
@@ -4990,9 +5007,9 @@
                 <a:solidFill>
                   <a:srgbClr val="6B7280"/>
                 </a:solidFill>
-                <a:latin typeface="Calibri" pitchFamily="34" charset="0"/>
-                <a:ea typeface="Calibri" pitchFamily="34" charset="-122"/>
-                <a:cs typeface="Calibri" pitchFamily="34" charset="-120"/>
+                <a:latin typeface="Calibri" panose="020F0502020204030204" pitchFamily="34" charset="0"/>
+                <a:ea typeface="Calibri" panose="020F0502020204030204" pitchFamily="34" charset="-122"/>
+                <a:cs typeface="Calibri" panose="020F0502020204030204" pitchFamily="34" charset="-120"/>
               </a:rPr>
               <a:t>in the next 30 days</a:t>
             </a:r>
@@ -5015,13 +5032,12 @@
             <a:avLst/>
           </a:prstGeom>
           <a:noFill/>
-          <a:ln/>
-        </p:spPr>
-        <p:txBody>
-          <a:bodyPr wrap="square" rtlCol="0" anchor="ctr"/>
-          <a:lstStyle/>
-          <a:p>
-            <a:pPr algn="ctr" indent="0" marL="0">
+        </p:spPr>
+        <p:txBody>
+          <a:bodyPr wrap="square" rtlCol="0" anchor="ctr"/>
+          <a:lstStyle/>
+          <a:p>
+            <a:pPr marL="0" indent="0" algn="ctr">
               <a:buNone/>
             </a:pPr>
             <a:r>
@@ -5029,9 +5045,9 @@
                 <a:solidFill>
                   <a:srgbClr val="CADCFC"/>
                 </a:solidFill>
-                <a:latin typeface="Cambria" pitchFamily="34" charset="0"/>
-                <a:ea typeface="Cambria" pitchFamily="34" charset="-122"/>
-                <a:cs typeface="Cambria" pitchFamily="34" charset="-120"/>
+                <a:latin typeface="Cambria" panose="02040503050406030204" pitchFamily="34" charset="0"/>
+                <a:ea typeface="Cambria" panose="02040503050406030204" pitchFamily="34" charset="-122"/>
+                <a:cs typeface="Cambria" panose="02040503050406030204" pitchFamily="34" charset="-120"/>
               </a:rPr>
               <a:t>40%</a:t>
             </a:r>
@@ -5054,13 +5070,12 @@
             <a:avLst/>
           </a:prstGeom>
           <a:noFill/>
-          <a:ln/>
-        </p:spPr>
-        <p:txBody>
-          <a:bodyPr wrap="square" rtlCol="0" anchor="ctr"/>
-          <a:lstStyle/>
-          <a:p>
-            <a:pPr algn="ctr" indent="0" marL="0">
+        </p:spPr>
+        <p:txBody>
+          <a:bodyPr wrap="square" rtlCol="0" anchor="ctr"/>
+          <a:lstStyle/>
+          <a:p>
+            <a:pPr marL="0" indent="0" algn="ctr">
               <a:lnSpc>
                 <a:spcPct val="110000"/>
               </a:lnSpc>
@@ -5071,16 +5086,16 @@
                 <a:solidFill>
                   <a:srgbClr val="6B7280"/>
                 </a:solidFill>
-                <a:latin typeface="Calibri" pitchFamily="34" charset="0"/>
-                <a:ea typeface="Calibri" pitchFamily="34" charset="-122"/>
-                <a:cs typeface="Calibri" pitchFamily="34" charset="-120"/>
+                <a:latin typeface="Calibri" panose="020F0502020204030204" pitchFamily="34" charset="0"/>
+                <a:ea typeface="Calibri" panose="020F0502020204030204" pitchFamily="34" charset="-122"/>
+                <a:cs typeface="Calibri" panose="020F0502020204030204" pitchFamily="34" charset="-120"/>
               </a:rPr>
               <a:t>of suppliers driving</a:t>
             </a:r>
             <a:endParaRPr lang="en-US" sz="1000" dirty="0"/>
           </a:p>
           <a:p>
-            <a:pPr algn="ctr" indent="0" marL="0">
+            <a:pPr marL="0" indent="0" algn="ctr">
               <a:lnSpc>
                 <a:spcPct val="110000"/>
               </a:lnSpc>
@@ -5091,9 +5106,9 @@
                 <a:solidFill>
                   <a:srgbClr val="6B7280"/>
                 </a:solidFill>
-                <a:latin typeface="Calibri" pitchFamily="34" charset="0"/>
-                <a:ea typeface="Calibri" pitchFamily="34" charset="-122"/>
-                <a:cs typeface="Calibri" pitchFamily="34" charset="-120"/>
+                <a:latin typeface="Calibri" panose="020F0502020204030204" pitchFamily="34" charset="0"/>
+                <a:ea typeface="Calibri" panose="020F0502020204030204" pitchFamily="34" charset="-122"/>
+                <a:cs typeface="Calibri" panose="020F0502020204030204" pitchFamily="34" charset="-120"/>
               </a:rPr>
               <a:t>100% of projected risk</a:t>
             </a:r>
@@ -5116,13 +5131,12 @@
             <a:avLst/>
           </a:prstGeom>
           <a:noFill/>
-          <a:ln/>
-        </p:spPr>
-        <p:txBody>
-          <a:bodyPr wrap="square" rtlCol="0" anchor="ctr"/>
-          <a:lstStyle/>
-          <a:p>
-            <a:pPr algn="ctr" indent="0" marL="0">
+        </p:spPr>
+        <p:txBody>
+          <a:bodyPr wrap="square" rtlCol="0" anchor="ctr"/>
+          <a:lstStyle/>
+          <a:p>
+            <a:pPr marL="0" indent="0" algn="ctr">
               <a:buNone/>
             </a:pPr>
             <a:r>
@@ -5130,9 +5144,9 @@
                 <a:solidFill>
                   <a:srgbClr val="CADCFC"/>
                 </a:solidFill>
-                <a:latin typeface="Cambria" pitchFamily="34" charset="0"/>
-                <a:ea typeface="Cambria" pitchFamily="34" charset="-122"/>
-                <a:cs typeface="Cambria" pitchFamily="34" charset="-120"/>
+                <a:latin typeface="Cambria" panose="02040503050406030204" pitchFamily="34" charset="0"/>
+                <a:ea typeface="Cambria" panose="02040503050406030204" pitchFamily="34" charset="-122"/>
+                <a:cs typeface="Cambria" panose="02040503050406030204" pitchFamily="34" charset="-120"/>
               </a:rPr>
               <a:t>30 days</a:t>
             </a:r>
@@ -5155,13 +5169,12 @@
             <a:avLst/>
           </a:prstGeom>
           <a:noFill/>
-          <a:ln/>
-        </p:spPr>
-        <p:txBody>
-          <a:bodyPr wrap="square" rtlCol="0" anchor="ctr"/>
-          <a:lstStyle/>
-          <a:p>
-            <a:pPr algn="ctr" indent="0" marL="0">
+        </p:spPr>
+        <p:txBody>
+          <a:bodyPr wrap="square" rtlCol="0" anchor="ctr"/>
+          <a:lstStyle/>
+          <a:p>
+            <a:pPr marL="0" indent="0" algn="ctr">
               <a:lnSpc>
                 <a:spcPct val="110000"/>
               </a:lnSpc>
@@ -5172,16 +5185,16 @@
                 <a:solidFill>
                   <a:srgbClr val="6B7280"/>
                 </a:solidFill>
-                <a:latin typeface="Calibri" pitchFamily="34" charset="0"/>
-                <a:ea typeface="Calibri" pitchFamily="34" charset="-122"/>
-                <a:cs typeface="Calibri" pitchFamily="34" charset="-120"/>
+                <a:latin typeface="Calibri" panose="020F0502020204030204" pitchFamily="34" charset="0"/>
+                <a:ea typeface="Calibri" panose="020F0502020204030204" pitchFamily="34" charset="-122"/>
+                <a:cs typeface="Calibri" panose="020F0502020204030204" pitchFamily="34" charset="-120"/>
               </a:rPr>
               <a:t>of lead time to act before</a:t>
             </a:r>
             <a:endParaRPr lang="en-US" sz="1000" dirty="0"/>
           </a:p>
           <a:p>
-            <a:pPr algn="ctr" indent="0" marL="0">
+            <a:pPr marL="0" indent="0" algn="ctr">
               <a:lnSpc>
                 <a:spcPct val="110000"/>
               </a:lnSpc>
@@ -5192,9 +5205,9 @@
                 <a:solidFill>
                   <a:srgbClr val="6B7280"/>
                 </a:solidFill>
-                <a:latin typeface="Calibri" pitchFamily="34" charset="0"/>
-                <a:ea typeface="Calibri" pitchFamily="34" charset="-122"/>
-                <a:cs typeface="Calibri" pitchFamily="34" charset="-120"/>
+                <a:latin typeface="Calibri" panose="020F0502020204030204" pitchFamily="34" charset="0"/>
+                <a:ea typeface="Calibri" panose="020F0502020204030204" pitchFamily="34" charset="-122"/>
+                <a:cs typeface="Calibri" panose="020F0502020204030204" pitchFamily="34" charset="-120"/>
               </a:rPr>
               <a:t>failures reach customers</a:t>
             </a:r>
@@ -5221,7 +5234,6 @@
           <a:solidFill>
             <a:srgbClr val="24316E"/>
           </a:solidFill>
-          <a:ln/>
         </p:spPr>
       </p:sp>
       <p:sp>
@@ -5239,13 +5251,12 @@
             <a:avLst/>
           </a:prstGeom>
           <a:noFill/>
-          <a:ln/>
-        </p:spPr>
-        <p:txBody>
-          <a:bodyPr wrap="square" rtlCol="0" anchor="ctr"/>
-          <a:lstStyle/>
-          <a:p>
-            <a:pPr indent="0" marL="0">
+        </p:spPr>
+        <p:txBody>
+          <a:bodyPr wrap="square" rtlCol="0" anchor="ctr"/>
+          <a:lstStyle/>
+          <a:p>
+            <a:pPr marL="0" indent="0">
               <a:lnSpc>
                 <a:spcPct val="125000"/>
               </a:lnSpc>
@@ -5256,141 +5267,121 @@
                 <a:solidFill>
                   <a:srgbClr val="CADCFC"/>
                 </a:solidFill>
-                <a:latin typeface="Calibri" pitchFamily="34" charset="0"/>
-                <a:ea typeface="Calibri" pitchFamily="34" charset="-122"/>
-                <a:cs typeface="Calibri" pitchFamily="34" charset="-120"/>
+                <a:latin typeface="Calibri" panose="020F0502020204030204" pitchFamily="34" charset="0"/>
+                <a:ea typeface="Calibri" panose="020F0502020204030204" pitchFamily="34" charset="-122"/>
+                <a:cs typeface="Calibri" panose="020F0502020204030204" pitchFamily="34" charset="-120"/>
               </a:rPr>
               <a:t>Illustrative impact: </a:t>
             </a:r>
-            <a:pPr indent="0" marL="0">
+            <a:r>
+              <a:rPr lang="en-US" sz="1200" dirty="0">
+                <a:solidFill>
+                  <a:srgbClr val="FFFFFF"/>
+                </a:solidFill>
+                <a:latin typeface="Calibri" panose="020F0502020204030204" pitchFamily="34" charset="0"/>
+                <a:ea typeface="Calibri" panose="020F0502020204030204" pitchFamily="34" charset="-122"/>
+                <a:cs typeface="Calibri" panose="020F0502020204030204" pitchFamily="34" charset="-120"/>
+              </a:rPr>
+              <a:t>at a typical ~$800–$1,200 warranty-claim cost per battery repair, proactively fixing the 2 highest-risk parts before ~2,649 projected failures could avoid an estimated </a:t>
+            </a:r>
+            <a:r>
+              <a:rPr lang="en-US" sz="1200" b="1" dirty="0">
+                <a:solidFill>
+                  <a:srgbClr val="FFFFFF"/>
+                </a:solidFill>
+                <a:latin typeface="Calibri" panose="020F0502020204030204" pitchFamily="34" charset="0"/>
+                <a:ea typeface="Calibri" panose="020F0502020204030204" pitchFamily="34" charset="-122"/>
+                <a:cs typeface="Calibri" panose="020F0502020204030204" pitchFamily="34" charset="-120"/>
+              </a:rPr>
+              <a:t>$2.1M–$3.2M</a:t>
+            </a:r>
+            <a:r>
+              <a:rPr lang="en-US" sz="1200" dirty="0">
+                <a:solidFill>
+                  <a:srgbClr val="FFFFFF"/>
+                </a:solidFill>
+                <a:latin typeface="Calibri" panose="020F0502020204030204" pitchFamily="34" charset="0"/>
+                <a:ea typeface="Calibri" panose="020F0502020204030204" pitchFamily="34" charset="-122"/>
+                <a:cs typeface="Calibri" panose="020F0502020204030204" pitchFamily="34" charset="-120"/>
+              </a:rPr>
+              <a:t> in 30-day warranty exposure — before brand and safety impact.</a:t>
+            </a:r>
+            <a:endParaRPr lang="en-US" sz="1200" dirty="0"/>
+          </a:p>
+        </p:txBody>
+      </p:sp>
+      <p:sp>
+        <p:nvSpPr>
+          <p:cNvPr id="12" name="Text 10"/>
+          <p:cNvSpPr txBox="1"/>
+          <p:nvPr/>
+        </p:nvSpPr>
+        <p:spPr>
+          <a:xfrm>
+            <a:off x="502920" y="3977640"/>
+            <a:ext cx="7315200" cy="274320"/>
+          </a:xfrm>
+          <a:prstGeom prst="rect">
+            <a:avLst/>
+          </a:prstGeom>
+          <a:noFill/>
+        </p:spPr>
+        <p:txBody>
+          <a:bodyPr wrap="square" rtlCol="0" anchor="ctr"/>
+          <a:lstStyle/>
+          <a:p>
+            <a:pPr marL="0" indent="0">
+              <a:buNone/>
+            </a:pPr>
+            <a:r>
+              <a:rPr lang="en-US" sz="1100" b="1" kern="0" spc="150" dirty="0">
+                <a:solidFill>
+                  <a:srgbClr val="CADCFC"/>
+                </a:solidFill>
+                <a:latin typeface="Calibri" panose="020F0502020204030204" pitchFamily="34" charset="0"/>
+                <a:ea typeface="Calibri" panose="020F0502020204030204" pitchFamily="34" charset="-122"/>
+                <a:cs typeface="Calibri" panose="020F0502020204030204" pitchFamily="34" charset="-120"/>
+              </a:rPr>
+              <a:t>INNOVATION: MCP SERVER</a:t>
+            </a:r>
+            <a:endParaRPr lang="en-US" sz="1100" dirty="0"/>
+          </a:p>
+        </p:txBody>
+      </p:sp>
+      <p:sp>
+        <p:nvSpPr>
+          <p:cNvPr id="13" name="Text 11"/>
+          <p:cNvSpPr txBox="1"/>
+          <p:nvPr/>
+        </p:nvSpPr>
+        <p:spPr>
+          <a:xfrm>
+            <a:off x="502920" y="4279392"/>
+            <a:ext cx="11155680" cy="822960"/>
+          </a:xfrm>
+          <a:prstGeom prst="rect">
+            <a:avLst/>
+          </a:prstGeom>
+          <a:noFill/>
+        </p:spPr>
+        <p:txBody>
+          <a:bodyPr wrap="square" rtlCol="0" anchor="ctr"/>
+          <a:lstStyle/>
+          <a:p>
+            <a:pPr marL="0" indent="0">
               <a:lnSpc>
                 <a:spcPct val="125000"/>
               </a:lnSpc>
               <a:buNone/>
             </a:pPr>
             <a:r>
-              <a:rPr lang="en-US" sz="1200" dirty="0">
-                <a:solidFill>
-                  <a:srgbClr val="FFFFFF"/>
-                </a:solidFill>
-                <a:latin typeface="Calibri" pitchFamily="34" charset="0"/>
-                <a:ea typeface="Calibri" pitchFamily="34" charset="-122"/>
-                <a:cs typeface="Calibri" pitchFamily="34" charset="-120"/>
-              </a:rPr>
-              <a:t>at a typical ~$800–$1,200 warranty-claim cost per battery repair, proactively fixing the 2 highest-risk parts before ~2,649 projected failures could avoid an estimated </a:t>
-            </a:r>
-            <a:pPr indent="0" marL="0">
-              <a:lnSpc>
-                <a:spcPct val="125000"/>
-              </a:lnSpc>
-              <a:buNone/>
-            </a:pPr>
-            <a:r>
-              <a:rPr lang="en-US" sz="1200" b="1" dirty="0">
-                <a:solidFill>
-                  <a:srgbClr val="FFFFFF"/>
-                </a:solidFill>
-                <a:latin typeface="Calibri" pitchFamily="34" charset="0"/>
-                <a:ea typeface="Calibri" pitchFamily="34" charset="-122"/>
-                <a:cs typeface="Calibri" pitchFamily="34" charset="-120"/>
-              </a:rPr>
-              <a:t>$2.1M–$3.2M</a:t>
-            </a:r>
-            <a:pPr indent="0" marL="0">
-              <a:lnSpc>
-                <a:spcPct val="125000"/>
-              </a:lnSpc>
-              <a:buNone/>
-            </a:pPr>
-            <a:r>
-              <a:rPr lang="en-US" sz="1200" dirty="0">
-                <a:solidFill>
-                  <a:srgbClr val="FFFFFF"/>
-                </a:solidFill>
-                <a:latin typeface="Calibri" pitchFamily="34" charset="0"/>
-                <a:ea typeface="Calibri" pitchFamily="34" charset="-122"/>
-                <a:cs typeface="Calibri" pitchFamily="34" charset="-120"/>
-              </a:rPr>
-              <a:t> in 30-day warranty exposure — before brand and safety impact.</a:t>
-            </a:r>
-            <a:endParaRPr lang="en-US" sz="1200" dirty="0"/>
-          </a:p>
-        </p:txBody>
-      </p:sp>
-      <p:sp>
-        <p:nvSpPr>
-          <p:cNvPr id="12" name="Text 10"/>
-          <p:cNvSpPr txBox="1"/>
-          <p:nvPr/>
-        </p:nvSpPr>
-        <p:spPr>
-          <a:xfrm>
-            <a:off x="502920" y="3977640"/>
-            <a:ext cx="7315200" cy="274320"/>
-          </a:xfrm>
-          <a:prstGeom prst="rect">
-            <a:avLst/>
-          </a:prstGeom>
-          <a:noFill/>
-          <a:ln/>
-        </p:spPr>
-        <p:txBody>
-          <a:bodyPr wrap="square" rtlCol="0" anchor="ctr"/>
-          <a:lstStyle/>
-          <a:p>
-            <a:pPr indent="0" marL="0">
-              <a:buNone/>
-            </a:pPr>
-            <a:r>
-              <a:rPr lang="en-US" sz="1100" b="1" spc="150" kern="0" dirty="0">
-                <a:solidFill>
-                  <a:srgbClr val="CADCFC"/>
-                </a:solidFill>
-                <a:latin typeface="Calibri" pitchFamily="34" charset="0"/>
-                <a:ea typeface="Calibri" pitchFamily="34" charset="-122"/>
-                <a:cs typeface="Calibri" pitchFamily="34" charset="-120"/>
-              </a:rPr>
-              <a:t>INNOVATION: MCP SERVER</a:t>
-            </a:r>
-            <a:endParaRPr lang="en-US" sz="1100" dirty="0"/>
-          </a:p>
-        </p:txBody>
-      </p:sp>
-      <p:sp>
-        <p:nvSpPr>
-          <p:cNvPr id="13" name="Text 11"/>
-          <p:cNvSpPr txBox="1"/>
-          <p:nvPr/>
-        </p:nvSpPr>
-        <p:spPr>
-          <a:xfrm>
-            <a:off x="502920" y="4279392"/>
-            <a:ext cx="11155680" cy="822960"/>
-          </a:xfrm>
-          <a:prstGeom prst="rect">
-            <a:avLst/>
-          </a:prstGeom>
-          <a:noFill/>
-          <a:ln/>
-        </p:spPr>
-        <p:txBody>
-          <a:bodyPr wrap="square" rtlCol="0" anchor="ctr"/>
-          <a:lstStyle/>
-          <a:p>
-            <a:pPr indent="0" marL="0">
-              <a:lnSpc>
-                <a:spcPct val="125000"/>
-              </a:lnSpc>
-              <a:buNone/>
-            </a:pPr>
-            <a:r>
               <a:rPr lang="en-US" sz="1150" dirty="0">
                 <a:solidFill>
                   <a:srgbClr val="D6DCF5"/>
                 </a:solidFill>
-                <a:latin typeface="Calibri" pitchFamily="34" charset="0"/>
-                <a:ea typeface="Calibri" pitchFamily="34" charset="-122"/>
-                <a:cs typeface="Calibri" pitchFamily="34" charset="-120"/>
+                <a:latin typeface="Calibri" panose="020F0502020204030204" pitchFamily="34" charset="0"/>
+                <a:ea typeface="Calibri" panose="020F0502020204030204" pitchFamily="34" charset="-122"/>
+                <a:cs typeface="Calibri" panose="020F0502020204030204" pitchFamily="34" charset="-120"/>
               </a:rPr>
               <a:t>A native Snowflake MCP Server exposes our Cortex Agent as a standard Model Context Protocol tool — any MCP-compatible client (Claude, ChatGPT, internal copilots) can call it directly, governed by the same Snowflake roles. No custom API or gateway required.</a:t>
             </a:r>
@@ -5413,23 +5404,22 @@
             <a:avLst/>
           </a:prstGeom>
           <a:noFill/>
-          <a:ln/>
-        </p:spPr>
-        <p:txBody>
-          <a:bodyPr wrap="square" rtlCol="0" anchor="ctr"/>
-          <a:lstStyle/>
-          <a:p>
-            <a:pPr indent="0" marL="0">
-              <a:buNone/>
-            </a:pPr>
-            <a:r>
-              <a:rPr lang="en-US" sz="1100" b="1" spc="150" kern="0" dirty="0">
+        </p:spPr>
+        <p:txBody>
+          <a:bodyPr wrap="square" rtlCol="0" anchor="ctr"/>
+          <a:lstStyle/>
+          <a:p>
+            <a:pPr marL="0" indent="0">
+              <a:buNone/>
+            </a:pPr>
+            <a:r>
+              <a:rPr lang="en-US" sz="1100" b="1" kern="0" spc="150" dirty="0">
                 <a:solidFill>
                   <a:srgbClr val="CADCFC"/>
                 </a:solidFill>
-                <a:latin typeface="Calibri" pitchFamily="34" charset="0"/>
-                <a:ea typeface="Calibri" pitchFamily="34" charset="-122"/>
-                <a:cs typeface="Calibri" pitchFamily="34" charset="-120"/>
+                <a:latin typeface="Calibri" panose="020F0502020204030204" pitchFamily="34" charset="0"/>
+                <a:ea typeface="Calibri" panose="020F0502020204030204" pitchFamily="34" charset="-122"/>
+                <a:cs typeface="Calibri" panose="020F0502020204030204" pitchFamily="34" charset="-120"/>
               </a:rPr>
               <a:t>BUILT ENTIRELY ON SNOWFLAKE</a:t>
             </a:r>
@@ -5456,7 +5446,6 @@
           <a:solidFill>
             <a:srgbClr val="2A377A"/>
           </a:solidFill>
-          <a:ln/>
         </p:spPr>
       </p:sp>
       <p:sp>
@@ -5474,13 +5463,12 @@
             <a:avLst/>
           </a:prstGeom>
           <a:noFill/>
-          <a:ln/>
-        </p:spPr>
-        <p:txBody>
-          <a:bodyPr wrap="square" rtlCol="0" anchor="ctr"/>
-          <a:lstStyle/>
-          <a:p>
-            <a:pPr algn="ctr" indent="0" marL="0">
+        </p:spPr>
+        <p:txBody>
+          <a:bodyPr wrap="square" rtlCol="0" anchor="ctr"/>
+          <a:lstStyle/>
+          <a:p>
+            <a:pPr marL="0" indent="0" algn="ctr">
               <a:buNone/>
             </a:pPr>
             <a:r>
@@ -5488,9 +5476,9 @@
                 <a:solidFill>
                   <a:srgbClr val="FFFFFF"/>
                 </a:solidFill>
-                <a:latin typeface="Calibri" pitchFamily="34" charset="0"/>
-                <a:ea typeface="Calibri" pitchFamily="34" charset="-122"/>
-                <a:cs typeface="Calibri" pitchFamily="34" charset="-120"/>
+                <a:latin typeface="Calibri" panose="020F0502020204030204" pitchFamily="34" charset="0"/>
+                <a:ea typeface="Calibri" panose="020F0502020204030204" pitchFamily="34" charset="-122"/>
+                <a:cs typeface="Calibri" panose="020F0502020204030204" pitchFamily="34" charset="-120"/>
               </a:rPr>
               <a:t>Semantic Views</a:t>
             </a:r>
@@ -5517,7 +5505,6 @@
           <a:solidFill>
             <a:srgbClr val="2A377A"/>
           </a:solidFill>
-          <a:ln/>
         </p:spPr>
       </p:sp>
       <p:sp>
@@ -5535,13 +5522,12 @@
             <a:avLst/>
           </a:prstGeom>
           <a:noFill/>
-          <a:ln/>
-        </p:spPr>
-        <p:txBody>
-          <a:bodyPr wrap="square" rtlCol="0" anchor="ctr"/>
-          <a:lstStyle/>
-          <a:p>
-            <a:pPr algn="ctr" indent="0" marL="0">
+        </p:spPr>
+        <p:txBody>
+          <a:bodyPr wrap="square" rtlCol="0" anchor="ctr"/>
+          <a:lstStyle/>
+          <a:p>
+            <a:pPr marL="0" indent="0" algn="ctr">
               <a:buNone/>
             </a:pPr>
             <a:r>
@@ -5549,9 +5535,9 @@
                 <a:solidFill>
                   <a:srgbClr val="FFFFFF"/>
                 </a:solidFill>
-                <a:latin typeface="Calibri" pitchFamily="34" charset="0"/>
-                <a:ea typeface="Calibri" pitchFamily="34" charset="-122"/>
-                <a:cs typeface="Calibri" pitchFamily="34" charset="-120"/>
+                <a:latin typeface="Calibri" panose="020F0502020204030204" pitchFamily="34" charset="0"/>
+                <a:ea typeface="Calibri" panose="020F0502020204030204" pitchFamily="34" charset="-122"/>
+                <a:cs typeface="Calibri" panose="020F0502020204030204" pitchFamily="34" charset="-120"/>
               </a:rPr>
               <a:t>Cortex Analyst</a:t>
             </a:r>
@@ -5578,7 +5564,6 @@
           <a:solidFill>
             <a:srgbClr val="2A377A"/>
           </a:solidFill>
-          <a:ln/>
         </p:spPr>
       </p:sp>
       <p:sp>
@@ -5596,13 +5581,12 @@
             <a:avLst/>
           </a:prstGeom>
           <a:noFill/>
-          <a:ln/>
-        </p:spPr>
-        <p:txBody>
-          <a:bodyPr wrap="square" rtlCol="0" anchor="ctr"/>
-          <a:lstStyle/>
-          <a:p>
-            <a:pPr algn="ctr" indent="0" marL="0">
+        </p:spPr>
+        <p:txBody>
+          <a:bodyPr wrap="square" rtlCol="0" anchor="ctr"/>
+          <a:lstStyle/>
+          <a:p>
+            <a:pPr marL="0" indent="0" algn="ctr">
               <a:buNone/>
             </a:pPr>
             <a:r>
@@ -5610,9 +5594,9 @@
                 <a:solidFill>
                   <a:srgbClr val="FFFFFF"/>
                 </a:solidFill>
-                <a:latin typeface="Calibri" pitchFamily="34" charset="0"/>
-                <a:ea typeface="Calibri" pitchFamily="34" charset="-122"/>
-                <a:cs typeface="Calibri" pitchFamily="34" charset="-120"/>
+                <a:latin typeface="Calibri" panose="020F0502020204030204" pitchFamily="34" charset="0"/>
+                <a:ea typeface="Calibri" panose="020F0502020204030204" pitchFamily="34" charset="-122"/>
+                <a:cs typeface="Calibri" panose="020F0502020204030204" pitchFamily="34" charset="-120"/>
               </a:rPr>
               <a:t>Cortex Agents</a:t>
             </a:r>
@@ -5639,7 +5623,6 @@
           <a:solidFill>
             <a:srgbClr val="2A377A"/>
           </a:solidFill>
-          <a:ln/>
         </p:spPr>
       </p:sp>
       <p:sp>
@@ -5657,13 +5640,12 @@
             <a:avLst/>
           </a:prstGeom>
           <a:noFill/>
-          <a:ln/>
-        </p:spPr>
-        <p:txBody>
-          <a:bodyPr wrap="square" rtlCol="0" anchor="ctr"/>
-          <a:lstStyle/>
-          <a:p>
-            <a:pPr algn="ctr" indent="0" marL="0">
+        </p:spPr>
+        <p:txBody>
+          <a:bodyPr wrap="square" rtlCol="0" anchor="ctr"/>
+          <a:lstStyle/>
+          <a:p>
+            <a:pPr marL="0" indent="0" algn="ctr">
               <a:buNone/>
             </a:pPr>
             <a:r>
@@ -5671,9 +5653,9 @@
                 <a:solidFill>
                   <a:srgbClr val="FFFFFF"/>
                 </a:solidFill>
-                <a:latin typeface="Calibri" pitchFamily="34" charset="0"/>
-                <a:ea typeface="Calibri" pitchFamily="34" charset="-122"/>
-                <a:cs typeface="Calibri" pitchFamily="34" charset="-120"/>
+                <a:latin typeface="Calibri" panose="020F0502020204030204" pitchFamily="34" charset="0"/>
+                <a:ea typeface="Calibri" panose="020F0502020204030204" pitchFamily="34" charset="-122"/>
+                <a:cs typeface="Calibri" panose="020F0502020204030204" pitchFamily="34" charset="-120"/>
               </a:rPr>
               <a:t>MCP Server</a:t>
             </a:r>
@@ -5700,7 +5682,6 @@
           <a:solidFill>
             <a:srgbClr val="2A377A"/>
           </a:solidFill>
-          <a:ln/>
         </p:spPr>
       </p:sp>
       <p:sp>
@@ -5718,13 +5699,12 @@
             <a:avLst/>
           </a:prstGeom>
           <a:noFill/>
-          <a:ln/>
-        </p:spPr>
-        <p:txBody>
-          <a:bodyPr wrap="square" rtlCol="0" anchor="ctr"/>
-          <a:lstStyle/>
-          <a:p>
-            <a:pPr algn="ctr" indent="0" marL="0">
+        </p:spPr>
+        <p:txBody>
+          <a:bodyPr wrap="square" rtlCol="0" anchor="ctr"/>
+          <a:lstStyle/>
+          <a:p>
+            <a:pPr marL="0" indent="0" algn="ctr">
               <a:buNone/>
             </a:pPr>
             <a:r>
@@ -5732,9 +5712,9 @@
                 <a:solidFill>
                   <a:srgbClr val="FFFFFF"/>
                 </a:solidFill>
-                <a:latin typeface="Calibri" pitchFamily="34" charset="0"/>
-                <a:ea typeface="Calibri" pitchFamily="34" charset="-122"/>
-                <a:cs typeface="Calibri" pitchFamily="34" charset="-120"/>
+                <a:latin typeface="Calibri" panose="020F0502020204030204" pitchFamily="34" charset="0"/>
+                <a:ea typeface="Calibri" panose="020F0502020204030204" pitchFamily="34" charset="-122"/>
+                <a:cs typeface="Calibri" panose="020F0502020204030204" pitchFamily="34" charset="-120"/>
               </a:rPr>
               <a:t>Streamlit in Snowflake</a:t>
             </a:r>
@@ -5761,7 +5741,6 @@
           <a:solidFill>
             <a:srgbClr val="2A377A"/>
           </a:solidFill>
-          <a:ln/>
         </p:spPr>
       </p:sp>
       <p:sp>
@@ -5779,13 +5758,12 @@
             <a:avLst/>
           </a:prstGeom>
           <a:noFill/>
-          <a:ln/>
-        </p:spPr>
-        <p:txBody>
-          <a:bodyPr wrap="square" rtlCol="0" anchor="ctr"/>
-          <a:lstStyle/>
-          <a:p>
-            <a:pPr algn="ctr" indent="0" marL="0">
+        </p:spPr>
+        <p:txBody>
+          <a:bodyPr wrap="square" rtlCol="0" anchor="ctr"/>
+          <a:lstStyle/>
+          <a:p>
+            <a:pPr marL="0" indent="0" algn="ctr">
               <a:buNone/>
             </a:pPr>
             <a:r>
@@ -5793,9 +5771,9 @@
                 <a:solidFill>
                   <a:srgbClr val="FFFFFF"/>
                 </a:solidFill>
-                <a:latin typeface="Calibri" pitchFamily="34" charset="0"/>
-                <a:ea typeface="Calibri" pitchFamily="34" charset="-122"/>
-                <a:cs typeface="Calibri" pitchFamily="34" charset="-120"/>
+                <a:latin typeface="Calibri" panose="020F0502020204030204" pitchFamily="34" charset="0"/>
+                <a:ea typeface="Calibri" panose="020F0502020204030204" pitchFamily="34" charset="-122"/>
+                <a:cs typeface="Calibri" panose="020F0502020204030204" pitchFamily="34" charset="-120"/>
               </a:rPr>
               <a:t>Poisson Forecasting</a:t>
             </a:r>
@@ -5822,7 +5800,6 @@
           <a:solidFill>
             <a:srgbClr val="2A377A"/>
           </a:solidFill>
-          <a:ln/>
         </p:spPr>
       </p:sp>
       <p:sp>
@@ -5840,13 +5817,12 @@
             <a:avLst/>
           </a:prstGeom>
           <a:noFill/>
-          <a:ln/>
-        </p:spPr>
-        <p:txBody>
-          <a:bodyPr wrap="square" rtlCol="0" anchor="ctr"/>
-          <a:lstStyle/>
-          <a:p>
-            <a:pPr algn="ctr" indent="0" marL="0">
+        </p:spPr>
+        <p:txBody>
+          <a:bodyPr wrap="square" rtlCol="0" anchor="ctr"/>
+          <a:lstStyle/>
+          <a:p>
+            <a:pPr marL="0" indent="0" algn="ctr">
               <a:buNone/>
             </a:pPr>
             <a:r>
@@ -5854,9 +5830,9 @@
                 <a:solidFill>
                   <a:srgbClr val="FFFFFF"/>
                 </a:solidFill>
-                <a:latin typeface="Calibri" pitchFamily="34" charset="0"/>
-                <a:ea typeface="Calibri" pitchFamily="34" charset="-122"/>
-                <a:cs typeface="Calibri" pitchFamily="34" charset="-120"/>
+                <a:latin typeface="Calibri" panose="020F0502020204030204" pitchFamily="34" charset="0"/>
+                <a:ea typeface="Calibri" panose="020F0502020204030204" pitchFamily="34" charset="-122"/>
+                <a:cs typeface="Calibri" panose="020F0502020204030204" pitchFamily="34" charset="-120"/>
               </a:rPr>
               <a:t>Role-Based Grants</a:t>
             </a:r>
@@ -5902,13 +5878,12 @@
             <a:avLst/>
           </a:prstGeom>
           <a:noFill/>
-          <a:ln/>
-        </p:spPr>
-        <p:txBody>
-          <a:bodyPr wrap="square" rtlCol="0" anchor="ctr"/>
-          <a:lstStyle/>
-          <a:p>
-            <a:pPr indent="0" marL="0">
+        </p:spPr>
+        <p:txBody>
+          <a:bodyPr wrap="square" rtlCol="0" anchor="ctr"/>
+          <a:lstStyle/>
+          <a:p>
+            <a:pPr marL="0" indent="0">
               <a:buNone/>
             </a:pPr>
             <a:r>
@@ -5916,9 +5891,9 @@
                 <a:solidFill>
                   <a:srgbClr val="FFFFFF"/>
                 </a:solidFill>
-                <a:latin typeface="Cambria" pitchFamily="34" charset="0"/>
-                <a:ea typeface="Cambria" pitchFamily="34" charset="-122"/>
-                <a:cs typeface="Cambria" pitchFamily="34" charset="-120"/>
+                <a:latin typeface="Cambria" panose="02040503050406030204" pitchFamily="34" charset="0"/>
+                <a:ea typeface="Cambria" panose="02040503050406030204" pitchFamily="34" charset="-122"/>
+                <a:cs typeface="Cambria" panose="02040503050406030204" pitchFamily="34" charset="-120"/>
               </a:rPr>
               <a:t>Thank you — questions welcome.</a:t>
             </a:r>
@@ -5941,13 +5916,12 @@
             <a:avLst/>
           </a:prstGeom>
           <a:noFill/>
-          <a:ln/>
-        </p:spPr>
-        <p:txBody>
-          <a:bodyPr wrap="square" rtlCol="0" anchor="ctr"/>
-          <a:lstStyle/>
-          <a:p>
-            <a:pPr indent="0" marL="0">
+        </p:spPr>
+        <p:txBody>
+          <a:bodyPr wrap="square" rtlCol="0" anchor="ctr"/>
+          <a:lstStyle/>
+          <a:p>
+            <a:pPr marL="0" indent="0">
               <a:buNone/>
             </a:pPr>
             <a:r>
@@ -5955,11 +5929,33 @@
                 <a:solidFill>
                   <a:srgbClr val="8B93B8"/>
                 </a:solidFill>
-                <a:latin typeface="Calibri" pitchFamily="34" charset="0"/>
-                <a:ea typeface="Calibri" pitchFamily="34" charset="-122"/>
-                <a:cs typeface="Calibri" pitchFamily="34" charset="-120"/>
-              </a:rPr>
-              <a:t>Team VoltGuard  |  Vehicle Quality RCA Platform  |  Snowflake × Capgemini Hackathon 2026</a:t>
+                <a:latin typeface="Calibri" panose="020F0502020204030204" pitchFamily="34" charset="0"/>
+                <a:ea typeface="Calibri" panose="020F0502020204030204" pitchFamily="34" charset="-122"/>
+                <a:cs typeface="Calibri" panose="020F0502020204030204" pitchFamily="34" charset="-120"/>
+              </a:rPr>
+              <a:t>Team </a:t>
+            </a:r>
+            <a:r>
+              <a:rPr lang="en-IN" altLang="en-US" sz="850" dirty="0">
+                <a:solidFill>
+                  <a:srgbClr val="8B93B8"/>
+                </a:solidFill>
+                <a:latin typeface="Calibri" panose="020F0502020204030204" pitchFamily="34" charset="0"/>
+                <a:ea typeface="Calibri" panose="020F0502020204030204" pitchFamily="34" charset="-122"/>
+                <a:cs typeface="Calibri" panose="020F0502020204030204" pitchFamily="34" charset="-120"/>
+              </a:rPr>
+              <a:t> The Snow Coders </a:t>
+            </a:r>
+            <a:r>
+              <a:rPr lang="en-US" sz="850" dirty="0">
+                <a:solidFill>
+                  <a:srgbClr val="8B93B8"/>
+                </a:solidFill>
+                <a:latin typeface="Calibri" panose="020F0502020204030204" pitchFamily="34" charset="0"/>
+                <a:ea typeface="Calibri" panose="020F0502020204030204" pitchFamily="34" charset="-122"/>
+                <a:cs typeface="Calibri" panose="020F0502020204030204" pitchFamily="34" charset="-120"/>
+              </a:rPr>
+              <a:t>|  Vehicle Quality RCA Platform  |  Snowflake × Capgemini Hackathon 2026</a:t>
             </a:r>
             <a:endParaRPr lang="en-US" sz="850" dirty="0"/>
           </a:p>
@@ -6016,7 +6012,7 @@
     </a:clrScheme>
     <a:fontScheme name="Office">
       <a:majorFont>
-        <a:latin typeface="Calibri Light" panose="020F0302020204030204"/>
+        <a:latin typeface="Calibri Light"/>
         <a:ea typeface=""/>
         <a:cs typeface=""/>
         <a:font script="Jpan" typeface="游ゴシック Light"/>
@@ -6049,26 +6045,9 @@
         <a:font script="Viet" typeface="Times New Roman"/>
         <a:font script="Uigh" typeface="Microsoft Uighur"/>
         <a:font script="Geor" typeface="Sylfaen"/>
-        <a:font script="Armn" typeface="Arial"/>
-        <a:font script="Bugi" typeface="Leelawadee UI"/>
-        <a:font script="Bopo" typeface="Microsoft JhengHei"/>
-        <a:font script="Java" typeface="Javanese Text"/>
-        <a:font script="Lisu" typeface="Segoe UI"/>
-        <a:font script="Mymr" typeface="Myanmar Text"/>
-        <a:font script="Nkoo" typeface="Ebrima"/>
-        <a:font script="Olck" typeface="Nirmala UI"/>
-        <a:font script="Osma" typeface="Ebrima"/>
-        <a:font script="Phag" typeface="Phagspa"/>
-        <a:font script="Syrn" typeface="Estrangelo Edessa"/>
-        <a:font script="Syrj" typeface="Estrangelo Edessa"/>
-        <a:font script="Syre" typeface="Estrangelo Edessa"/>
-        <a:font script="Sora" typeface="Nirmala UI"/>
-        <a:font script="Tale" typeface="Microsoft Tai Le"/>
-        <a:font script="Talu" typeface="Microsoft New Tai Lue"/>
-        <a:font script="Tfng" typeface="Ebrima"/>
       </a:majorFont>
       <a:minorFont>
-        <a:latin typeface="Calibri" panose="020F0502020204030204"/>
+        <a:latin typeface="Calibri"/>
         <a:ea typeface=""/>
         <a:cs typeface=""/>
         <a:font script="Jpan" typeface="游ゴシック"/>
@@ -6101,23 +6080,6 @@
         <a:font script="Viet" typeface="Arial"/>
         <a:font script="Uigh" typeface="Microsoft Uighur"/>
         <a:font script="Geor" typeface="Sylfaen"/>
-        <a:font script="Armn" typeface="Arial"/>
-        <a:font script="Bugi" typeface="Leelawadee UI"/>
-        <a:font script="Bopo" typeface="Microsoft JhengHei"/>
-        <a:font script="Java" typeface="Javanese Text"/>
-        <a:font script="Lisu" typeface="Segoe UI"/>
-        <a:font script="Mymr" typeface="Myanmar Text"/>
-        <a:font script="Nkoo" typeface="Ebrima"/>
-        <a:font script="Olck" typeface="Nirmala UI"/>
-        <a:font script="Osma" typeface="Ebrima"/>
-        <a:font script="Phag" typeface="Phagspa"/>
-        <a:font script="Syrn" typeface="Estrangelo Edessa"/>
-        <a:font script="Syrj" typeface="Estrangelo Edessa"/>
-        <a:font script="Syre" typeface="Estrangelo Edessa"/>
-        <a:font script="Sora" typeface="Nirmala UI"/>
-        <a:font script="Tale" typeface="Microsoft Tai Le"/>
-        <a:font script="Talu" typeface="Microsoft New Tai Lue"/>
-        <a:font script="Tfng" typeface="Ebrima"/>
       </a:minorFont>
     </a:fontScheme>
     <a:fmtScheme name="Office">
@@ -6258,8 +6220,265 @@
       </a:bgFillStyleLst>
     </a:fmtScheme>
   </a:themeElements>
-  <a:objectDefaults/>
-  <a:extraClrSchemeLst/>
+  <a:extLst>
+    <a:ext uri="{05A4C25C-085E-4340-85A3-A5531E510DB2}">
+      <thm15:themeFamily xmlns:thm15="http://schemas.microsoft.com/office/thememl/2012/main" name="Office Theme" id="{62F939B6-93AF-4DB8-9C6B-D6C7DFDC589F}" vid="{4A3C46E8-61CC-4603-A589-7422A47A8E4A}"/>
+    </a:ext>
+  </a:extLst>
+</a:theme>
+</file>
+
+<file path=ppt/theme/theme2.xml><?xml version="1.0" encoding="utf-8"?>
+<a:theme xmlns:a="http://schemas.openxmlformats.org/drawingml/2006/main" name="Office Theme">
+  <a:themeElements>
+    <a:clrScheme name="Office">
+      <a:dk1>
+        <a:sysClr val="windowText" lastClr="000000"/>
+      </a:dk1>
+      <a:lt1>
+        <a:sysClr val="window" lastClr="FFFFFF"/>
+      </a:lt1>
+      <a:dk2>
+        <a:srgbClr val="44546A"/>
+      </a:dk2>
+      <a:lt2>
+        <a:srgbClr val="E7E6E6"/>
+      </a:lt2>
+      <a:accent1>
+        <a:srgbClr val="4472C4"/>
+      </a:accent1>
+      <a:accent2>
+        <a:srgbClr val="ED7D31"/>
+      </a:accent2>
+      <a:accent3>
+        <a:srgbClr val="A5A5A5"/>
+      </a:accent3>
+      <a:accent4>
+        <a:srgbClr val="FFC000"/>
+      </a:accent4>
+      <a:accent5>
+        <a:srgbClr val="5B9BD5"/>
+      </a:accent5>
+      <a:accent6>
+        <a:srgbClr val="70AD47"/>
+      </a:accent6>
+      <a:hlink>
+        <a:srgbClr val="0563C1"/>
+      </a:hlink>
+      <a:folHlink>
+        <a:srgbClr val="954F72"/>
+      </a:folHlink>
+    </a:clrScheme>
+    <a:fontScheme name="Office">
+      <a:majorFont>
+        <a:latin typeface="Calibri Light"/>
+        <a:ea typeface=""/>
+        <a:cs typeface=""/>
+        <a:font script="Jpan" typeface="游ゴシック Light"/>
+        <a:font script="Hang" typeface="맑은 고딕"/>
+        <a:font script="Hans" typeface="等线 Light"/>
+        <a:font script="Hant" typeface="新細明體"/>
+        <a:font script="Arab" typeface="Times New Roman"/>
+        <a:font script="Hebr" typeface="Times New Roman"/>
+        <a:font script="Thai" typeface="Angsana New"/>
+        <a:font script="Ethi" typeface="Nyala"/>
+        <a:font script="Beng" typeface="Vrinda"/>
+        <a:font script="Gujr" typeface="Shruti"/>
+        <a:font script="Khmr" typeface="MoolBoran"/>
+        <a:font script="Knda" typeface="Tunga"/>
+        <a:font script="Guru" typeface="Raavi"/>
+        <a:font script="Cans" typeface="Euphemia"/>
+        <a:font script="Cher" typeface="Plantagenet Cherokee"/>
+        <a:font script="Yiii" typeface="Microsoft Yi Baiti"/>
+        <a:font script="Tibt" typeface="Microsoft Himalaya"/>
+        <a:font script="Thaa" typeface="MV Boli"/>
+        <a:font script="Deva" typeface="Mangal"/>
+        <a:font script="Telu" typeface="Gautami"/>
+        <a:font script="Taml" typeface="Latha"/>
+        <a:font script="Syrc" typeface="Estrangelo Edessa"/>
+        <a:font script="Orya" typeface="Kalinga"/>
+        <a:font script="Mlym" typeface="Kartika"/>
+        <a:font script="Laoo" typeface="DokChampa"/>
+        <a:font script="Sinh" typeface="Iskoola Pota"/>
+        <a:font script="Mong" typeface="Mongolian Baiti"/>
+        <a:font script="Viet" typeface="Times New Roman"/>
+        <a:font script="Uigh" typeface="Microsoft Uighur"/>
+        <a:font script="Geor" typeface="Sylfaen"/>
+      </a:majorFont>
+      <a:minorFont>
+        <a:latin typeface="Calibri"/>
+        <a:ea typeface=""/>
+        <a:cs typeface=""/>
+        <a:font script="Jpan" typeface="游ゴシック"/>
+        <a:font script="Hang" typeface="맑은 고딕"/>
+        <a:font script="Hans" typeface="等线"/>
+        <a:font script="Hant" typeface="新細明體"/>
+        <a:font script="Arab" typeface="Arial"/>
+        <a:font script="Hebr" typeface="Arial"/>
+        <a:font script="Thai" typeface="Cordia New"/>
+        <a:font script="Ethi" typeface="Nyala"/>
+        <a:font script="Beng" typeface="Vrinda"/>
+        <a:font script="Gujr" typeface="Shruti"/>
+        <a:font script="Khmr" typeface="DaunPenh"/>
+        <a:font script="Knda" typeface="Tunga"/>
+        <a:font script="Guru" typeface="Raavi"/>
+        <a:font script="Cans" typeface="Euphemia"/>
+        <a:font script="Cher" typeface="Plantagenet Cherokee"/>
+        <a:font script="Yiii" typeface="Microsoft Yi Baiti"/>
+        <a:font script="Tibt" typeface="Microsoft Himalaya"/>
+        <a:font script="Thaa" typeface="MV Boli"/>
+        <a:font script="Deva" typeface="Mangal"/>
+        <a:font script="Telu" typeface="Gautami"/>
+        <a:font script="Taml" typeface="Latha"/>
+        <a:font script="Syrc" typeface="Estrangelo Edessa"/>
+        <a:font script="Orya" typeface="Kalinga"/>
+        <a:font script="Mlym" typeface="Kartika"/>
+        <a:font script="Laoo" typeface="DokChampa"/>
+        <a:font script="Sinh" typeface="Iskoola Pota"/>
+        <a:font script="Mong" typeface="Mongolian Baiti"/>
+        <a:font script="Viet" typeface="Arial"/>
+        <a:font script="Uigh" typeface="Microsoft Uighur"/>
+        <a:font script="Geor" typeface="Sylfaen"/>
+      </a:minorFont>
+    </a:fontScheme>
+    <a:fmtScheme name="Office">
+      <a:fillStyleLst>
+        <a:solidFill>
+          <a:schemeClr val="phClr"/>
+        </a:solidFill>
+        <a:gradFill rotWithShape="1">
+          <a:gsLst>
+            <a:gs pos="0">
+              <a:schemeClr val="phClr">
+                <a:lumMod val="110000"/>
+                <a:satMod val="105000"/>
+                <a:tint val="67000"/>
+              </a:schemeClr>
+            </a:gs>
+            <a:gs pos="50000">
+              <a:schemeClr val="phClr">
+                <a:lumMod val="105000"/>
+                <a:satMod val="103000"/>
+                <a:tint val="73000"/>
+              </a:schemeClr>
+            </a:gs>
+            <a:gs pos="100000">
+              <a:schemeClr val="phClr">
+                <a:lumMod val="105000"/>
+                <a:satMod val="109000"/>
+                <a:tint val="81000"/>
+              </a:schemeClr>
+            </a:gs>
+          </a:gsLst>
+          <a:lin ang="5400000" scaled="0"/>
+        </a:gradFill>
+        <a:gradFill rotWithShape="1">
+          <a:gsLst>
+            <a:gs pos="0">
+              <a:schemeClr val="phClr">
+                <a:satMod val="103000"/>
+                <a:lumMod val="102000"/>
+                <a:tint val="94000"/>
+              </a:schemeClr>
+            </a:gs>
+            <a:gs pos="50000">
+              <a:schemeClr val="phClr">
+                <a:satMod val="110000"/>
+                <a:lumMod val="100000"/>
+                <a:shade val="100000"/>
+              </a:schemeClr>
+            </a:gs>
+            <a:gs pos="100000">
+              <a:schemeClr val="phClr">
+                <a:lumMod val="99000"/>
+                <a:satMod val="120000"/>
+                <a:shade val="78000"/>
+              </a:schemeClr>
+            </a:gs>
+          </a:gsLst>
+          <a:lin ang="5400000" scaled="0"/>
+        </a:gradFill>
+      </a:fillStyleLst>
+      <a:lnStyleLst>
+        <a:ln w="6350" cap="flat" cmpd="sng" algn="ctr">
+          <a:solidFill>
+            <a:schemeClr val="phClr"/>
+          </a:solidFill>
+          <a:prstDash val="solid"/>
+          <a:miter lim="800000"/>
+        </a:ln>
+        <a:ln w="12700" cap="flat" cmpd="sng" algn="ctr">
+          <a:solidFill>
+            <a:schemeClr val="phClr"/>
+          </a:solidFill>
+          <a:prstDash val="solid"/>
+          <a:miter lim="800000"/>
+        </a:ln>
+        <a:ln w="19050" cap="flat" cmpd="sng" algn="ctr">
+          <a:solidFill>
+            <a:schemeClr val="phClr"/>
+          </a:solidFill>
+          <a:prstDash val="solid"/>
+          <a:miter lim="800000"/>
+        </a:ln>
+      </a:lnStyleLst>
+      <a:effectStyleLst>
+        <a:effectStyle>
+          <a:effectLst/>
+        </a:effectStyle>
+        <a:effectStyle>
+          <a:effectLst/>
+        </a:effectStyle>
+        <a:effectStyle>
+          <a:effectLst>
+            <a:outerShdw blurRad="57150" dist="19050" dir="5400000" algn="ctr" rotWithShape="0">
+              <a:srgbClr val="000000">
+                <a:alpha val="63000"/>
+              </a:srgbClr>
+            </a:outerShdw>
+          </a:effectLst>
+        </a:effectStyle>
+      </a:effectStyleLst>
+      <a:bgFillStyleLst>
+        <a:solidFill>
+          <a:schemeClr val="phClr"/>
+        </a:solidFill>
+        <a:solidFill>
+          <a:schemeClr val="phClr">
+            <a:tint val="95000"/>
+            <a:satMod val="170000"/>
+          </a:schemeClr>
+        </a:solidFill>
+        <a:gradFill rotWithShape="1">
+          <a:gsLst>
+            <a:gs pos="0">
+              <a:schemeClr val="phClr">
+                <a:tint val="93000"/>
+                <a:satMod val="150000"/>
+                <a:shade val="98000"/>
+                <a:lumMod val="102000"/>
+              </a:schemeClr>
+            </a:gs>
+            <a:gs pos="50000">
+              <a:schemeClr val="phClr">
+                <a:tint val="98000"/>
+                <a:satMod val="130000"/>
+                <a:shade val="90000"/>
+                <a:lumMod val="103000"/>
+              </a:schemeClr>
+            </a:gs>
+            <a:gs pos="100000">
+              <a:schemeClr val="phClr">
+                <a:shade val="63000"/>
+                <a:satMod val="120000"/>
+              </a:schemeClr>
+            </a:gs>
+          </a:gsLst>
+          <a:lin ang="5400000" scaled="0"/>
+        </a:gradFill>
+      </a:bgFillStyleLst>
+    </a:fmtScheme>
+  </a:themeElements>
   <a:extLst>
     <a:ext uri="{05A4C25C-085E-4340-85A3-A5531E510DB2}">
       <thm15:themeFamily xmlns:thm15="http://schemas.microsoft.com/office/thememl/2012/main" name="Office Theme" id="{62F939B6-93AF-4DB8-9C6B-D6C7DFDC589F}" vid="{4A3C46E8-61CC-4603-A589-7422A47A8E4A}"/>
